--- a/Especializacion/Proyecto I/Clases/Sesion 10 - Planeación, viabilidad e integración del anteproyecto/Presentacion.pptx
+++ b/Especializacion/Proyecto I/Clases/Sesion 10 - Planeación, viabilidad e integración del anteproyecto/Presentacion.pptx
@@ -3364,41 +3364,6 @@
           </a:p>
         </p:txBody>
       </p:sp>
-      <p:sp>
-        <p:nvSpPr>
-          <p:cNvPr id="7" name="TextBox 6"/>
-          <p:cNvSpPr txBox="1"/>
-          <p:nvPr/>
-        </p:nvSpPr>
-        <p:spPr>
-          <a:xfrm>
-            <a:off x="2194560" y="6446520"/>
-            <a:ext cx="5943600" cy="274320"/>
-          </a:xfrm>
-          <a:prstGeom prst="rect">
-            <a:avLst/>
-          </a:prstGeom>
-          <a:noFill/>
-        </p:spPr>
-        <p:txBody>
-          <a:bodyPr wrap="square" anchor="t" lIns="0" rIns="0" tIns="0" bIns="0">
-            <a:spAutoFit/>
-          </a:bodyPr>
-          <a:lstStyle/>
-          <a:p>
-            <a:pPr algn="l"/>
-            <a:r>
-              <a:rPr sz="1000" b="1" i="0">
-                <a:solidFill>
-                  <a:srgbClr val="8F989D"/>
-                </a:solidFill>
-                <a:latin typeface="Calibri"/>
-              </a:rPr>
-              <a:t>Inicio 8:10 pm</a:t>
-            </a:r>
-          </a:p>
-        </p:txBody>
-      </p:sp>
     </p:spTree>
   </p:cSld>
   <p:clrMapOvr>
@@ -4529,41 +4494,6 @@
         </p:nvSpPr>
         <p:spPr>
           <a:xfrm>
-            <a:off x="2194560" y="6446520"/>
-            <a:ext cx="5943600" cy="274320"/>
-          </a:xfrm>
-          <a:prstGeom prst="rect">
-            <a:avLst/>
-          </a:prstGeom>
-          <a:noFill/>
-        </p:spPr>
-        <p:txBody>
-          <a:bodyPr wrap="square" anchor="t" lIns="0" rIns="0" tIns="0" bIns="0">
-            <a:spAutoFit/>
-          </a:bodyPr>
-          <a:lstStyle/>
-          <a:p>
-            <a:pPr algn="l"/>
-            <a:r>
-              <a:rPr sz="1000" b="1" i="0">
-                <a:solidFill>
-                  <a:srgbClr val="8F989D"/>
-                </a:solidFill>
-                <a:latin typeface="Calibri"/>
-              </a:rPr>
-              <a:t>Inicio 8:10 pm</a:t>
-            </a:r>
-          </a:p>
-        </p:txBody>
-      </p:sp>
-      <p:sp>
-        <p:nvSpPr>
-          <p:cNvPr id="7" name="TextBox 6"/>
-          <p:cNvSpPr txBox="1"/>
-          <p:nvPr/>
-        </p:nvSpPr>
-        <p:spPr>
-          <a:xfrm>
             <a:off x="11094415" y="6446520"/>
             <a:ext cx="548640" cy="274320"/>
           </a:xfrm>
@@ -5067,41 +4997,6 @@
         </p:nvSpPr>
         <p:spPr>
           <a:xfrm>
-            <a:off x="2194560" y="6446520"/>
-            <a:ext cx="5943600" cy="274320"/>
-          </a:xfrm>
-          <a:prstGeom prst="rect">
-            <a:avLst/>
-          </a:prstGeom>
-          <a:noFill/>
-        </p:spPr>
-        <p:txBody>
-          <a:bodyPr wrap="square" anchor="t" lIns="0" rIns="0" tIns="0" bIns="0">
-            <a:spAutoFit/>
-          </a:bodyPr>
-          <a:lstStyle/>
-          <a:p>
-            <a:pPr algn="l"/>
-            <a:r>
-              <a:rPr sz="1000" b="1" i="0">
-                <a:solidFill>
-                  <a:srgbClr val="8F989D"/>
-                </a:solidFill>
-                <a:latin typeface="Calibri"/>
-              </a:rPr>
-              <a:t>Inicio 8:10 pm</a:t>
-            </a:r>
-          </a:p>
-        </p:txBody>
-      </p:sp>
-      <p:sp>
-        <p:nvSpPr>
-          <p:cNvPr id="11" name="TextBox 10"/>
-          <p:cNvSpPr txBox="1"/>
-          <p:nvPr/>
-        </p:nvSpPr>
-        <p:spPr>
-          <a:xfrm>
             <a:off x="11094415" y="6446520"/>
             <a:ext cx="548640" cy="274320"/>
           </a:xfrm>
@@ -5345,41 +5240,6 @@
         </p:nvSpPr>
         <p:spPr>
           <a:xfrm>
-            <a:off x="2194560" y="6446520"/>
-            <a:ext cx="5943600" cy="274320"/>
-          </a:xfrm>
-          <a:prstGeom prst="rect">
-            <a:avLst/>
-          </a:prstGeom>
-          <a:noFill/>
-        </p:spPr>
-        <p:txBody>
-          <a:bodyPr wrap="square" anchor="t" lIns="0" rIns="0" tIns="0" bIns="0">
-            <a:spAutoFit/>
-          </a:bodyPr>
-          <a:lstStyle/>
-          <a:p>
-            <a:pPr algn="l"/>
-            <a:r>
-              <a:rPr sz="1000" b="1" i="0">
-                <a:solidFill>
-                  <a:srgbClr val="8F989D"/>
-                </a:solidFill>
-                <a:latin typeface="Calibri"/>
-              </a:rPr>
-              <a:t>Inicio 8:10 pm</a:t>
-            </a:r>
-          </a:p>
-        </p:txBody>
-      </p:sp>
-      <p:sp>
-        <p:nvSpPr>
-          <p:cNvPr id="7" name="TextBox 6"/>
-          <p:cNvSpPr txBox="1"/>
-          <p:nvPr/>
-        </p:nvSpPr>
-        <p:spPr>
-          <a:xfrm>
             <a:off x="11094415" y="6446520"/>
             <a:ext cx="548640" cy="274320"/>
           </a:xfrm>
@@ -6011,41 +5871,6 @@
         </p:nvSpPr>
         <p:spPr>
           <a:xfrm>
-            <a:off x="2194560" y="6446520"/>
-            <a:ext cx="5943600" cy="274320"/>
-          </a:xfrm>
-          <a:prstGeom prst="rect">
-            <a:avLst/>
-          </a:prstGeom>
-          <a:noFill/>
-        </p:spPr>
-        <p:txBody>
-          <a:bodyPr wrap="square" anchor="t" lIns="0" rIns="0" tIns="0" bIns="0">
-            <a:spAutoFit/>
-          </a:bodyPr>
-          <a:lstStyle/>
-          <a:p>
-            <a:pPr algn="l"/>
-            <a:r>
-              <a:rPr sz="1000" b="1" i="0">
-                <a:solidFill>
-                  <a:srgbClr val="8F989D"/>
-                </a:solidFill>
-                <a:latin typeface="Calibri"/>
-              </a:rPr>
-              <a:t>Inicio 8:10 pm</a:t>
-            </a:r>
-          </a:p>
-        </p:txBody>
-      </p:sp>
-      <p:sp>
-        <p:nvSpPr>
-          <p:cNvPr id="6" name="TextBox 5"/>
-          <p:cNvSpPr txBox="1"/>
-          <p:nvPr/>
-        </p:nvSpPr>
-        <p:spPr>
-          <a:xfrm>
             <a:off x="11094415" y="6446520"/>
             <a:ext cx="548640" cy="274320"/>
           </a:xfrm>
@@ -6075,7 +5900,7 @@
       </p:sp>
       <p:sp>
         <p:nvSpPr>
-          <p:cNvPr id="7" name="TextBox 6"/>
+          <p:cNvPr id="6" name="TextBox 5"/>
           <p:cNvSpPr txBox="1"/>
           <p:nvPr/>
         </p:nvSpPr>
@@ -6639,41 +6464,6 @@
         </p:nvSpPr>
         <p:spPr>
           <a:xfrm>
-            <a:off x="2194560" y="6446520"/>
-            <a:ext cx="5943600" cy="274320"/>
-          </a:xfrm>
-          <a:prstGeom prst="rect">
-            <a:avLst/>
-          </a:prstGeom>
-          <a:noFill/>
-        </p:spPr>
-        <p:txBody>
-          <a:bodyPr wrap="square" anchor="t" lIns="0" rIns="0" tIns="0" bIns="0">
-            <a:spAutoFit/>
-          </a:bodyPr>
-          <a:lstStyle/>
-          <a:p>
-            <a:pPr algn="l"/>
-            <a:r>
-              <a:rPr sz="1000" b="1" i="0">
-                <a:solidFill>
-                  <a:srgbClr val="8F989D"/>
-                </a:solidFill>
-                <a:latin typeface="Calibri"/>
-              </a:rPr>
-              <a:t>Inicio 8:10 pm</a:t>
-            </a:r>
-          </a:p>
-        </p:txBody>
-      </p:sp>
-      <p:sp>
-        <p:nvSpPr>
-          <p:cNvPr id="6" name="TextBox 5"/>
-          <p:cNvSpPr txBox="1"/>
-          <p:nvPr/>
-        </p:nvSpPr>
-        <p:spPr>
-          <a:xfrm>
             <a:off x="11094415" y="6446520"/>
             <a:ext cx="548640" cy="274320"/>
           </a:xfrm>
@@ -7143,41 +6933,6 @@
         </p:nvSpPr>
         <p:spPr>
           <a:xfrm>
-            <a:off x="2194560" y="6446520"/>
-            <a:ext cx="5943600" cy="274320"/>
-          </a:xfrm>
-          <a:prstGeom prst="rect">
-            <a:avLst/>
-          </a:prstGeom>
-          <a:noFill/>
-        </p:spPr>
-        <p:txBody>
-          <a:bodyPr wrap="square" anchor="t" lIns="0" rIns="0" tIns="0" bIns="0">
-            <a:spAutoFit/>
-          </a:bodyPr>
-          <a:lstStyle/>
-          <a:p>
-            <a:pPr algn="l"/>
-            <a:r>
-              <a:rPr sz="1000" b="1" i="0">
-                <a:solidFill>
-                  <a:srgbClr val="8F989D"/>
-                </a:solidFill>
-                <a:latin typeface="Calibri"/>
-              </a:rPr>
-              <a:t>Inicio 8:10 pm</a:t>
-            </a:r>
-          </a:p>
-        </p:txBody>
-      </p:sp>
-      <p:sp>
-        <p:nvSpPr>
-          <p:cNvPr id="6" name="TextBox 5"/>
-          <p:cNvSpPr txBox="1"/>
-          <p:nvPr/>
-        </p:nvSpPr>
-        <p:spPr>
-          <a:xfrm>
             <a:off x="11094415" y="6446520"/>
             <a:ext cx="548640" cy="274320"/>
           </a:xfrm>
@@ -7611,41 +7366,6 @@
         </p:nvSpPr>
         <p:spPr>
           <a:xfrm>
-            <a:off x="2194560" y="6446520"/>
-            <a:ext cx="5943600" cy="274320"/>
-          </a:xfrm>
-          <a:prstGeom prst="rect">
-            <a:avLst/>
-          </a:prstGeom>
-          <a:noFill/>
-        </p:spPr>
-        <p:txBody>
-          <a:bodyPr wrap="square" anchor="t" lIns="0" rIns="0" tIns="0" bIns="0">
-            <a:spAutoFit/>
-          </a:bodyPr>
-          <a:lstStyle/>
-          <a:p>
-            <a:pPr algn="l"/>
-            <a:r>
-              <a:rPr sz="1000" b="1" i="0">
-                <a:solidFill>
-                  <a:srgbClr val="8F989D"/>
-                </a:solidFill>
-                <a:latin typeface="Calibri"/>
-              </a:rPr>
-              <a:t>Inicio 8:10 pm</a:t>
-            </a:r>
-          </a:p>
-        </p:txBody>
-      </p:sp>
-      <p:sp>
-        <p:nvSpPr>
-          <p:cNvPr id="6" name="TextBox 5"/>
-          <p:cNvSpPr txBox="1"/>
-          <p:nvPr/>
-        </p:nvSpPr>
-        <p:spPr>
-          <a:xfrm>
             <a:off x="11094415" y="6446520"/>
             <a:ext cx="548640" cy="274320"/>
           </a:xfrm>
@@ -7892,41 +7612,6 @@
           </a:p>
         </p:txBody>
       </p:sp>
-      <p:sp>
-        <p:nvSpPr>
-          <p:cNvPr id="7" name="TextBox 6"/>
-          <p:cNvSpPr txBox="1"/>
-          <p:nvPr/>
-        </p:nvSpPr>
-        <p:spPr>
-          <a:xfrm>
-            <a:off x="2194560" y="6446520"/>
-            <a:ext cx="5943600" cy="274320"/>
-          </a:xfrm>
-          <a:prstGeom prst="rect">
-            <a:avLst/>
-          </a:prstGeom>
-          <a:noFill/>
-        </p:spPr>
-        <p:txBody>
-          <a:bodyPr wrap="square" anchor="t" lIns="0" rIns="0" tIns="0" bIns="0">
-            <a:spAutoFit/>
-          </a:bodyPr>
-          <a:lstStyle/>
-          <a:p>
-            <a:pPr algn="l"/>
-            <a:r>
-              <a:rPr sz="1000" b="1" i="0">
-                <a:solidFill>
-                  <a:srgbClr val="8F989D"/>
-                </a:solidFill>
-                <a:latin typeface="Calibri"/>
-              </a:rPr>
-              <a:t>Inicio 8:10 pm</a:t>
-            </a:r>
-          </a:p>
-        </p:txBody>
-      </p:sp>
     </p:spTree>
   </p:cSld>
   <p:clrMapOvr>
@@ -8405,41 +8090,6 @@
         </p:nvSpPr>
         <p:spPr>
           <a:xfrm>
-            <a:off x="2194560" y="6446520"/>
-            <a:ext cx="5943600" cy="274320"/>
-          </a:xfrm>
-          <a:prstGeom prst="rect">
-            <a:avLst/>
-          </a:prstGeom>
-          <a:noFill/>
-        </p:spPr>
-        <p:txBody>
-          <a:bodyPr wrap="square" anchor="t" lIns="0" rIns="0" tIns="0" bIns="0">
-            <a:spAutoFit/>
-          </a:bodyPr>
-          <a:lstStyle/>
-          <a:p>
-            <a:pPr algn="l"/>
-            <a:r>
-              <a:rPr sz="1000" b="1" i="0">
-                <a:solidFill>
-                  <a:srgbClr val="8F989D"/>
-                </a:solidFill>
-                <a:latin typeface="Calibri"/>
-              </a:rPr>
-              <a:t>Inicio 8:10 pm</a:t>
-            </a:r>
-          </a:p>
-        </p:txBody>
-      </p:sp>
-      <p:sp>
-        <p:nvSpPr>
-          <p:cNvPr id="6" name="TextBox 5"/>
-          <p:cNvSpPr txBox="1"/>
-          <p:nvPr/>
-        </p:nvSpPr>
-        <p:spPr>
-          <a:xfrm>
             <a:off x="11094415" y="6446520"/>
             <a:ext cx="548640" cy="274320"/>
           </a:xfrm>
@@ -8981,41 +8631,6 @@
         </p:nvSpPr>
         <p:spPr>
           <a:xfrm>
-            <a:off x="2194560" y="6446520"/>
-            <a:ext cx="5943600" cy="274320"/>
-          </a:xfrm>
-          <a:prstGeom prst="rect">
-            <a:avLst/>
-          </a:prstGeom>
-          <a:noFill/>
-        </p:spPr>
-        <p:txBody>
-          <a:bodyPr wrap="square" anchor="t" lIns="0" rIns="0" tIns="0" bIns="0">
-            <a:spAutoFit/>
-          </a:bodyPr>
-          <a:lstStyle/>
-          <a:p>
-            <a:pPr algn="l"/>
-            <a:r>
-              <a:rPr sz="1000" b="1" i="0">
-                <a:solidFill>
-                  <a:srgbClr val="8F989D"/>
-                </a:solidFill>
-                <a:latin typeface="Calibri"/>
-              </a:rPr>
-              <a:t>Inicio 8:10 pm</a:t>
-            </a:r>
-          </a:p>
-        </p:txBody>
-      </p:sp>
-      <p:sp>
-        <p:nvSpPr>
-          <p:cNvPr id="6" name="TextBox 5"/>
-          <p:cNvSpPr txBox="1"/>
-          <p:nvPr/>
-        </p:nvSpPr>
-        <p:spPr>
-          <a:xfrm>
             <a:off x="11094415" y="6446520"/>
             <a:ext cx="548640" cy="274320"/>
           </a:xfrm>
@@ -9988,41 +9603,6 @@
         </p:nvSpPr>
         <p:spPr>
           <a:xfrm>
-            <a:off x="2194560" y="6446520"/>
-            <a:ext cx="5943600" cy="274320"/>
-          </a:xfrm>
-          <a:prstGeom prst="rect">
-            <a:avLst/>
-          </a:prstGeom>
-          <a:noFill/>
-        </p:spPr>
-        <p:txBody>
-          <a:bodyPr wrap="square" anchor="t" lIns="0" rIns="0" tIns="0" bIns="0">
-            <a:spAutoFit/>
-          </a:bodyPr>
-          <a:lstStyle/>
-          <a:p>
-            <a:pPr algn="l"/>
-            <a:r>
-              <a:rPr sz="1000" b="1" i="0">
-                <a:solidFill>
-                  <a:srgbClr val="8F989D"/>
-                </a:solidFill>
-                <a:latin typeface="Calibri"/>
-              </a:rPr>
-              <a:t>Inicio 8:10 pm</a:t>
-            </a:r>
-          </a:p>
-        </p:txBody>
-      </p:sp>
-      <p:sp>
-        <p:nvSpPr>
-          <p:cNvPr id="7" name="TextBox 6"/>
-          <p:cNvSpPr txBox="1"/>
-          <p:nvPr/>
-        </p:nvSpPr>
-        <p:spPr>
-          <a:xfrm>
             <a:off x="11094415" y="6446520"/>
             <a:ext cx="548640" cy="274320"/>
           </a:xfrm>
@@ -10793,41 +10373,6 @@
         </p:nvSpPr>
         <p:spPr>
           <a:xfrm>
-            <a:off x="2194560" y="6446520"/>
-            <a:ext cx="5943600" cy="274320"/>
-          </a:xfrm>
-          <a:prstGeom prst="rect">
-            <a:avLst/>
-          </a:prstGeom>
-          <a:noFill/>
-        </p:spPr>
-        <p:txBody>
-          <a:bodyPr wrap="square" anchor="t" lIns="0" rIns="0" tIns="0" bIns="0">
-            <a:spAutoFit/>
-          </a:bodyPr>
-          <a:lstStyle/>
-          <a:p>
-            <a:pPr algn="l"/>
-            <a:r>
-              <a:rPr sz="1000" b="1" i="0">
-                <a:solidFill>
-                  <a:srgbClr val="8F989D"/>
-                </a:solidFill>
-                <a:latin typeface="Calibri"/>
-              </a:rPr>
-              <a:t>Inicio 8:10 pm</a:t>
-            </a:r>
-          </a:p>
-        </p:txBody>
-      </p:sp>
-      <p:sp>
-        <p:nvSpPr>
-          <p:cNvPr id="7" name="TextBox 6"/>
-          <p:cNvSpPr txBox="1"/>
-          <p:nvPr/>
-        </p:nvSpPr>
-        <p:spPr>
-          <a:xfrm>
             <a:off x="11094415" y="6446520"/>
             <a:ext cx="548640" cy="274320"/>
           </a:xfrm>
@@ -11279,41 +10824,6 @@
         </p:nvSpPr>
         <p:spPr>
           <a:xfrm>
-            <a:off x="2194560" y="6446520"/>
-            <a:ext cx="5943600" cy="274320"/>
-          </a:xfrm>
-          <a:prstGeom prst="rect">
-            <a:avLst/>
-          </a:prstGeom>
-          <a:noFill/>
-        </p:spPr>
-        <p:txBody>
-          <a:bodyPr wrap="square" anchor="t" lIns="0" rIns="0" tIns="0" bIns="0">
-            <a:spAutoFit/>
-          </a:bodyPr>
-          <a:lstStyle/>
-          <a:p>
-            <a:pPr algn="l"/>
-            <a:r>
-              <a:rPr sz="1000" b="1" i="0">
-                <a:solidFill>
-                  <a:srgbClr val="8F989D"/>
-                </a:solidFill>
-                <a:latin typeface="Calibri"/>
-              </a:rPr>
-              <a:t>Inicio 8:10 pm</a:t>
-            </a:r>
-          </a:p>
-        </p:txBody>
-      </p:sp>
-      <p:sp>
-        <p:nvSpPr>
-          <p:cNvPr id="6" name="TextBox 5"/>
-          <p:cNvSpPr txBox="1"/>
-          <p:nvPr/>
-        </p:nvSpPr>
-        <p:spPr>
-          <a:xfrm>
             <a:off x="11094415" y="6446520"/>
             <a:ext cx="548640" cy="274320"/>
           </a:xfrm>
@@ -12057,41 +11567,6 @@
         </p:nvSpPr>
         <p:spPr>
           <a:xfrm>
-            <a:off x="2194560" y="6446520"/>
-            <a:ext cx="5943600" cy="274320"/>
-          </a:xfrm>
-          <a:prstGeom prst="rect">
-            <a:avLst/>
-          </a:prstGeom>
-          <a:noFill/>
-        </p:spPr>
-        <p:txBody>
-          <a:bodyPr wrap="square" anchor="t" lIns="0" rIns="0" tIns="0" bIns="0">
-            <a:spAutoFit/>
-          </a:bodyPr>
-          <a:lstStyle/>
-          <a:p>
-            <a:pPr algn="l"/>
-            <a:r>
-              <a:rPr sz="1000" b="1" i="0">
-                <a:solidFill>
-                  <a:srgbClr val="8F989D"/>
-                </a:solidFill>
-                <a:latin typeface="Calibri"/>
-              </a:rPr>
-              <a:t>Inicio 8:10 pm</a:t>
-            </a:r>
-          </a:p>
-        </p:txBody>
-      </p:sp>
-      <p:sp>
-        <p:nvSpPr>
-          <p:cNvPr id="7" name="TextBox 6"/>
-          <p:cNvSpPr txBox="1"/>
-          <p:nvPr/>
-        </p:nvSpPr>
-        <p:spPr>
-          <a:xfrm>
             <a:off x="11094415" y="6446520"/>
             <a:ext cx="548640" cy="274320"/>
           </a:xfrm>
@@ -12579,41 +12054,6 @@
         </p:nvSpPr>
         <p:spPr>
           <a:xfrm>
-            <a:off x="2194560" y="6446520"/>
-            <a:ext cx="5943600" cy="274320"/>
-          </a:xfrm>
-          <a:prstGeom prst="rect">
-            <a:avLst/>
-          </a:prstGeom>
-          <a:noFill/>
-        </p:spPr>
-        <p:txBody>
-          <a:bodyPr wrap="square" anchor="t" lIns="0" rIns="0" tIns="0" bIns="0">
-            <a:spAutoFit/>
-          </a:bodyPr>
-          <a:lstStyle/>
-          <a:p>
-            <a:pPr algn="l"/>
-            <a:r>
-              <a:rPr sz="1000" b="1" i="0">
-                <a:solidFill>
-                  <a:srgbClr val="8F989D"/>
-                </a:solidFill>
-                <a:latin typeface="Calibri"/>
-              </a:rPr>
-              <a:t>Inicio 8:10 pm</a:t>
-            </a:r>
-          </a:p>
-        </p:txBody>
-      </p:sp>
-      <p:sp>
-        <p:nvSpPr>
-          <p:cNvPr id="6" name="TextBox 5"/>
-          <p:cNvSpPr txBox="1"/>
-          <p:nvPr/>
-        </p:nvSpPr>
-        <p:spPr>
-          <a:xfrm>
             <a:off x="11094415" y="6446520"/>
             <a:ext cx="548640" cy="274320"/>
           </a:xfrm>
@@ -13485,41 +12925,6 @@
       <p:sp>
         <p:nvSpPr>
           <p:cNvPr id="6" name="TextBox 5"/>
-          <p:cNvSpPr txBox="1"/>
-          <p:nvPr/>
-        </p:nvSpPr>
-        <p:spPr>
-          <a:xfrm>
-            <a:off x="2194560" y="6446520"/>
-            <a:ext cx="5943600" cy="274320"/>
-          </a:xfrm>
-          <a:prstGeom prst="rect">
-            <a:avLst/>
-          </a:prstGeom>
-          <a:noFill/>
-        </p:spPr>
-        <p:txBody>
-          <a:bodyPr wrap="square" anchor="t" lIns="0" rIns="0" tIns="0" bIns="0">
-            <a:spAutoFit/>
-          </a:bodyPr>
-          <a:lstStyle/>
-          <a:p>
-            <a:pPr algn="l"/>
-            <a:r>
-              <a:rPr sz="1000" b="1" i="0">
-                <a:solidFill>
-                  <a:srgbClr val="8F989D"/>
-                </a:solidFill>
-                <a:latin typeface="Calibri"/>
-              </a:rPr>
-              <a:t>Inicio 8:10 pm</a:t>
-            </a:r>
-          </a:p>
-        </p:txBody>
-      </p:sp>
-      <p:sp>
-        <p:nvSpPr>
-          <p:cNvPr id="7" name="TextBox 6"/>
           <p:cNvSpPr txBox="1"/>
           <p:nvPr/>
         </p:nvSpPr>

--- a/Especializacion/Proyecto I/Clases/Sesion 10 - Planeación, viabilidad e integración del anteproyecto/Presentacion.pptx
+++ b/Especializacion/Proyecto I/Clases/Sesion 10 - Planeación, viabilidad e integración del anteproyecto/Presentacion.pptx
@@ -22,6 +22,8 @@
     <p:sldId id="270" r:id="rId21"/>
     <p:sldId id="271" r:id="rId22"/>
     <p:sldId id="272" r:id="rId23"/>
+    <p:sldId id="273" r:id="rId24"/>
+    <p:sldId id="274" r:id="rId25"/>
   </p:sldIdLst>
   <p:sldSz cx="12191695" cy="6858000" type="screen4x3"/>
   <p:notesSz cx="6858000" cy="9144000"/>
@@ -6032,7 +6034,7 @@
                 </a:solidFill>
                 <a:latin typeface="Calibri"/>
               </a:rPr>
-              <a:t>TALLER · Matriz de coherencia y lista de gaps (20 minutos)</a:t>
+              <a:t>TALLER · Matriz de coherencia y lista de gaps</a:t>
             </a:r>
           </a:p>
         </p:txBody>
@@ -6045,8 +6047,8 @@
         </p:nvSpPr>
         <p:spPr>
           <a:xfrm>
-            <a:off x="640080" y="1691639"/>
-            <a:ext cx="10911535" cy="4617720"/>
+            <a:off x="640080" y="1280160"/>
+            <a:ext cx="10911535" cy="411480"/>
           </a:xfrm>
           <a:prstGeom prst="rect">
             <a:avLst/>
@@ -6059,6 +6061,41 @@
           </a:bodyPr>
           <a:lstStyle/>
           <a:p>
+            <a:pPr algn="ctr"/>
+            <a:r>
+              <a:rPr sz="1500" b="0" i="0">
+                <a:solidFill>
+                  <a:srgbClr val="2B2B2B"/>
+                </a:solidFill>
+                <a:latin typeface="Calibri"/>
+              </a:rPr>
+              <a:t>Por equipos, con el documento completo abierto en un solo archivo · tengan la matriz en pantalla</a:t>
+            </a:r>
+          </a:p>
+        </p:txBody>
+      </p:sp>
+      <p:sp>
+        <p:nvSpPr>
+          <p:cNvPr id="5" name="TextBox 4"/>
+          <p:cNvSpPr txBox="1"/>
+          <p:nvPr/>
+        </p:nvSpPr>
+        <p:spPr>
+          <a:xfrm>
+            <a:off x="640080" y="2011679"/>
+            <a:ext cx="10911535" cy="4297680"/>
+          </a:xfrm>
+          <a:prstGeom prst="rect">
+            <a:avLst/>
+          </a:prstGeom>
+          <a:noFill/>
+        </p:spPr>
+        <p:txBody>
+          <a:bodyPr wrap="square" anchor="t" lIns="0" rIns="0" tIns="0" bIns="0">
+            <a:spAutoFit/>
+          </a:bodyPr>
+          <a:lstStyle/>
+          <a:p>
             <a:pPr>
               <a:spcAft>
                 <a:spcPts val="1000"/>
@@ -6080,7 +6117,7 @@
                 </a:solidFill>
                 <a:latin typeface="Calibri"/>
               </a:rPr>
-              <a:t>Consigna literal</a:t>
+              <a:t>Al final tiene:</a:t>
             </a:r>
             <a:r>
               <a:rPr sz="1600" b="0" i="0">
@@ -6089,267 +6126,7 @@
                 </a:solidFill>
                 <a:latin typeface="Calibri"/>
               </a:rPr>
-              <a:t>, con el documento completo abierto en un solo archivo:</a:t>
-            </a:r>
-          </a:p>
-          <a:p>
-            <a:pPr lvl="1">
-              <a:spcAft>
-                <a:spcPts val="600"/>
-              </a:spcAft>
-            </a:pPr>
-            <a:r>
-              <a:rPr sz="1500" b="0" i="0">
-                <a:solidFill>
-                  <a:srgbClr val="2B2B2B"/>
-                </a:solidFill>
-                <a:latin typeface="Calibri"/>
-              </a:rPr>
-              <a:t>●   </a:t>
-            </a:r>
-            <a:r>
-              <a:rPr sz="1500" b="1" i="0">
-                <a:solidFill>
-                  <a:srgbClr val="2B2B2B"/>
-                </a:solidFill>
-                <a:latin typeface="Calibri"/>
-              </a:rPr>
-              <a:t>(a)</a:t>
-            </a:r>
-            <a:r>
-              <a:rPr sz="1500" b="0" i="0">
-                <a:solidFill>
-                  <a:srgbClr val="2B2B2B"/>
-                </a:solidFill>
-                <a:latin typeface="Calibri"/>
-              </a:rPr>
-              <a:t> Cree en Google Docs una tabla con cinco columnas: </a:t>
-            </a:r>
-            <a:r>
-              <a:rPr sz="1500" b="1" i="0">
-                <a:solidFill>
-                  <a:srgbClr val="2B2B2B"/>
-                </a:solidFill>
-                <a:latin typeface="Calibri"/>
-              </a:rPr>
-              <a:t>Sección | ¿Existe? | ¿Alineada con la pregunta? | Gap | Responsable</a:t>
-            </a:r>
-            <a:r>
-              <a:rPr sz="1500" b="0" i="0">
-                <a:solidFill>
-                  <a:srgbClr val="2B2B2B"/>
-                </a:solidFill>
-                <a:latin typeface="Calibri"/>
-              </a:rPr>
-              <a:t>.</a:t>
-            </a:r>
-          </a:p>
-          <a:p>
-            <a:pPr lvl="1">
-              <a:spcAft>
-                <a:spcPts val="600"/>
-              </a:spcAft>
-            </a:pPr>
-            <a:r>
-              <a:rPr sz="1500" b="0" i="0">
-                <a:solidFill>
-                  <a:srgbClr val="2B2B2B"/>
-                </a:solidFill>
-                <a:latin typeface="Calibri"/>
-              </a:rPr>
-              <a:t>●   </a:t>
-            </a:r>
-            <a:r>
-              <a:rPr sz="1500" b="1" i="0">
-                <a:solidFill>
-                  <a:srgbClr val="2B2B2B"/>
-                </a:solidFill>
-                <a:latin typeface="Calibri"/>
-              </a:rPr>
-              <a:t>(b)</a:t>
-            </a:r>
-            <a:r>
-              <a:rPr sz="1500" b="0" i="0">
-                <a:solidFill>
-                  <a:srgbClr val="2B2B2B"/>
-                </a:solidFill>
-                <a:latin typeface="Calibri"/>
-              </a:rPr>
-              <a:t> Use como filas las </a:t>
-            </a:r>
-            <a:r>
-              <a:rPr sz="1500" b="1" i="0">
-                <a:solidFill>
-                  <a:srgbClr val="2B2B2B"/>
-                </a:solidFill>
-                <a:latin typeface="Calibri"/>
-              </a:rPr>
-              <a:t>ocho secciones</a:t>
-            </a:r>
-            <a:r>
-              <a:rPr sz="1500" b="0" i="0">
-                <a:solidFill>
-                  <a:srgbClr val="2B2B2B"/>
-                </a:solidFill>
-                <a:latin typeface="Calibri"/>
-              </a:rPr>
-              <a:t> del hilo (problema, pregunta, objetivos, marco, método, instrumento, cronograma, referencias).</a:t>
-            </a:r>
-          </a:p>
-          <a:p>
-            <a:pPr lvl="1">
-              <a:spcAft>
-                <a:spcPts val="600"/>
-              </a:spcAft>
-            </a:pPr>
-            <a:r>
-              <a:rPr sz="1500" b="0" i="0">
-                <a:solidFill>
-                  <a:srgbClr val="2B2B2B"/>
-                </a:solidFill>
-                <a:latin typeface="Calibri"/>
-              </a:rPr>
-              <a:t>●   </a:t>
-            </a:r>
-            <a:r>
-              <a:rPr sz="1500" b="1" i="0">
-                <a:solidFill>
-                  <a:srgbClr val="2B2B2B"/>
-                </a:solidFill>
-                <a:latin typeface="Calibri"/>
-              </a:rPr>
-              <a:t>(c)</a:t>
-            </a:r>
-            <a:r>
-              <a:rPr sz="1500" b="0" i="0">
-                <a:solidFill>
-                  <a:srgbClr val="2B2B2B"/>
-                </a:solidFill>
-                <a:latin typeface="Calibri"/>
-              </a:rPr>
-              <a:t> Marque cada casilla con evidencia: si dice "sí", debe poder señalar </a:t>
-            </a:r>
-            <a:r>
-              <a:rPr sz="1500" b="1" i="0">
-                <a:solidFill>
-                  <a:srgbClr val="2B2B2B"/>
-                </a:solidFill>
-                <a:latin typeface="Calibri"/>
-              </a:rPr>
-              <a:t>en qué página</a:t>
-            </a:r>
-            <a:r>
-              <a:rPr sz="1500" b="0" i="0">
-                <a:solidFill>
-                  <a:srgbClr val="2B2B2B"/>
-                </a:solidFill>
-                <a:latin typeface="Calibri"/>
-              </a:rPr>
-              <a:t> está.</a:t>
-            </a:r>
-          </a:p>
-          <a:p>
-            <a:pPr lvl="1">
-              <a:spcAft>
-                <a:spcPts val="600"/>
-              </a:spcAft>
-            </a:pPr>
-            <a:r>
-              <a:rPr sz="1500" b="0" i="0">
-                <a:solidFill>
-                  <a:srgbClr val="2B2B2B"/>
-                </a:solidFill>
-                <a:latin typeface="Calibri"/>
-              </a:rPr>
-              <a:t>●   </a:t>
-            </a:r>
-            <a:r>
-              <a:rPr sz="1500" b="1" i="0">
-                <a:solidFill>
-                  <a:srgbClr val="2B2B2B"/>
-                </a:solidFill>
-                <a:latin typeface="Calibri"/>
-              </a:rPr>
-              <a:t>(d)</a:t>
-            </a:r>
-            <a:r>
-              <a:rPr sz="1500" b="0" i="0">
-                <a:solidFill>
-                  <a:srgbClr val="2B2B2B"/>
-                </a:solidFill>
-                <a:latin typeface="Calibri"/>
-              </a:rPr>
-              <a:t> Convierta cada casilla en rojo o parcial en un </a:t>
-            </a:r>
-            <a:r>
-              <a:rPr sz="1500" b="1" i="0">
-                <a:solidFill>
-                  <a:srgbClr val="2B2B2B"/>
-                </a:solidFill>
-                <a:latin typeface="Calibri"/>
-              </a:rPr>
-              <a:t>gap con responsable</a:t>
-            </a:r>
-            <a:r>
-              <a:rPr sz="1500" b="0" i="0">
-                <a:solidFill>
-                  <a:srgbClr val="2B2B2B"/>
-                </a:solidFill>
-                <a:latin typeface="Calibri"/>
-              </a:rPr>
-              <a:t> y ordénelos por impacto.</a:t>
-            </a:r>
-          </a:p>
-          <a:p>
-            <a:pPr lvl="1">
-              <a:spcAft>
-                <a:spcPts val="600"/>
-              </a:spcAft>
-            </a:pPr>
-            <a:r>
-              <a:rPr sz="1500" b="0" i="0">
-                <a:solidFill>
-                  <a:srgbClr val="2B2B2B"/>
-                </a:solidFill>
-                <a:latin typeface="Calibri"/>
-              </a:rPr>
-              <a:t>●   </a:t>
-            </a:r>
-            <a:r>
-              <a:rPr sz="1500" b="1" i="0">
-                <a:solidFill>
-                  <a:srgbClr val="2B2B2B"/>
-                </a:solidFill>
-                <a:latin typeface="Calibri"/>
-              </a:rPr>
-              <a:t>(e)</a:t>
-            </a:r>
-            <a:r>
-              <a:rPr sz="1500" b="0" i="0">
-                <a:solidFill>
-                  <a:srgbClr val="2B2B2B"/>
-                </a:solidFill>
-                <a:latin typeface="Calibri"/>
-              </a:rPr>
-              <a:t> Termine el bosquejo del </a:t>
-            </a:r>
-            <a:r>
-              <a:rPr sz="1500" b="1" i="0">
-                <a:solidFill>
-                  <a:srgbClr val="2B2B2B"/>
-                </a:solidFill>
-                <a:latin typeface="Calibri"/>
-              </a:rPr>
-              <a:t>cronograma</a:t>
-            </a:r>
-            <a:r>
-              <a:rPr sz="1500" b="0" i="0">
-                <a:solidFill>
-                  <a:srgbClr val="2B2B2B"/>
-                </a:solidFill>
-                <a:latin typeface="Calibri"/>
-              </a:rPr>
-              <a:t> con las fases que le falten, empezando por la gestión de permisos.</a:t>
+              <a:t> la matriz de las ocho secciones, los gaps con responsable y el cronograma cerrado.</a:t>
             </a:r>
           </a:p>
           <a:p>
@@ -6374,7 +6151,7 @@
                 </a:solidFill>
                 <a:latin typeface="Calibri"/>
               </a:rPr>
-              <a:t>Criterio de éxito verificable:</a:t>
+              <a:t>Paso 1</a:t>
             </a:r>
             <a:r>
               <a:rPr sz="1600" b="0" i="0">
@@ -6383,7 +6160,7 @@
                 </a:solidFill>
                 <a:latin typeface="Calibri"/>
               </a:rPr>
-              <a:t> </a:t>
+              <a:t> · Cree una tabla con cinco columnas: </a:t>
             </a:r>
             <a:r>
               <a:rPr sz="1600" b="1" i="0">
@@ -6392,7 +6169,7 @@
                 </a:solidFill>
                 <a:latin typeface="Calibri"/>
               </a:rPr>
-              <a:t>ningún gap queda sin responsable</a:t>
+              <a:t>Sección | ¿Existe? | ¿Alineada con la pregunta? | Gap | Responsable</a:t>
             </a:r>
             <a:r>
               <a:rPr sz="1600" b="0" i="0">
@@ -6401,7 +6178,7 @@
                 </a:solidFill>
                 <a:latin typeface="Calibri"/>
               </a:rPr>
-              <a:t> y las ocho secciones tienen casilla marcada.</a:t>
+              <a:t>.</a:t>
             </a:r>
           </a:p>
           <a:p>
@@ -6417,7 +6194,43 @@
                 </a:solidFill>
                 <a:latin typeface="Calibri"/>
               </a:rPr>
-              <a:t>–   El Docente circula por los equipos; tenga la matriz en pantalla cuando llegue su turno.</a:t>
+              <a:t>–   </a:t>
+            </a:r>
+            <a:r>
+              <a:rPr sz="1600" b="1" i="0">
+                <a:solidFill>
+                  <a:srgbClr val="2B2B2B"/>
+                </a:solidFill>
+                <a:latin typeface="Calibri"/>
+              </a:rPr>
+              <a:t>Paso 2</a:t>
+            </a:r>
+            <a:r>
+              <a:rPr sz="1600" b="0" i="0">
+                <a:solidFill>
+                  <a:srgbClr val="2B2B2B"/>
+                </a:solidFill>
+                <a:latin typeface="Calibri"/>
+              </a:rPr>
+              <a:t> · Use como filas las </a:t>
+            </a:r>
+            <a:r>
+              <a:rPr sz="1600" b="1" i="0">
+                <a:solidFill>
+                  <a:srgbClr val="2B2B2B"/>
+                </a:solidFill>
+                <a:latin typeface="Calibri"/>
+              </a:rPr>
+              <a:t>ocho secciones</a:t>
+            </a:r>
+            <a:r>
+              <a:rPr sz="1600" b="0" i="0">
+                <a:solidFill>
+                  <a:srgbClr val="2B2B2B"/>
+                </a:solidFill>
+                <a:latin typeface="Calibri"/>
+              </a:rPr>
+              <a:t> del hilo: problema, pregunta, objetivos, marco, método, instrumento, cronograma, referencias.</a:t>
             </a:r>
           </a:p>
           <a:p>
@@ -6442,7 +6255,7 @@
                 </a:solidFill>
                 <a:latin typeface="Calibri"/>
               </a:rPr>
-              <a:t>Entrega:</a:t>
+              <a:t>Paso 3</a:t>
             </a:r>
             <a:r>
               <a:rPr sz="1600" b="0" i="0">
@@ -6451,14 +6264,206 @@
                 </a:solidFill>
                 <a:latin typeface="Calibri"/>
               </a:rPr>
-              <a:t> suba el archivo como `S10_IntegracionViabilidad_Apellidos` en [URL CDigital — campus del curso pendiente].</a:t>
-            </a:r>
-          </a:p>
-        </p:txBody>
-      </p:sp>
-      <p:sp>
-        <p:nvSpPr>
-          <p:cNvPr id="5" name="TextBox 4"/>
+              <a:t> · Marque cada casilla </a:t>
+            </a:r>
+            <a:r>
+              <a:rPr sz="1600" b="1" i="0">
+                <a:solidFill>
+                  <a:srgbClr val="2B2B2B"/>
+                </a:solidFill>
+                <a:latin typeface="Calibri"/>
+              </a:rPr>
+              <a:t>con evidencia</a:t>
+            </a:r>
+            <a:r>
+              <a:rPr sz="1600" b="0" i="0">
+                <a:solidFill>
+                  <a:srgbClr val="2B2B2B"/>
+                </a:solidFill>
+                <a:latin typeface="Calibri"/>
+              </a:rPr>
+              <a:t>: si dice «sí», debe poder señalar </a:t>
+            </a:r>
+            <a:r>
+              <a:rPr sz="1600" b="1" i="0">
+                <a:solidFill>
+                  <a:srgbClr val="2B2B2B"/>
+                </a:solidFill>
+                <a:latin typeface="Calibri"/>
+              </a:rPr>
+              <a:t>en qué página</a:t>
+            </a:r>
+            <a:r>
+              <a:rPr sz="1600" b="0" i="0">
+                <a:solidFill>
+                  <a:srgbClr val="2B2B2B"/>
+                </a:solidFill>
+                <a:latin typeface="Calibri"/>
+              </a:rPr>
+              <a:t> está.</a:t>
+            </a:r>
+          </a:p>
+          <a:p>
+            <a:pPr>
+              <a:spcAft>
+                <a:spcPts val="1000"/>
+              </a:spcAft>
+            </a:pPr>
+            <a:r>
+              <a:rPr sz="1600" b="0" i="0">
+                <a:solidFill>
+                  <a:srgbClr val="2B2B2B"/>
+                </a:solidFill>
+                <a:latin typeface="Calibri"/>
+              </a:rPr>
+              <a:t>–   </a:t>
+            </a:r>
+            <a:r>
+              <a:rPr sz="1600" b="1" i="0">
+                <a:solidFill>
+                  <a:srgbClr val="2B2B2B"/>
+                </a:solidFill>
+                <a:latin typeface="Calibri"/>
+              </a:rPr>
+              <a:t>Paso 4</a:t>
+            </a:r>
+            <a:r>
+              <a:rPr sz="1600" b="0" i="0">
+                <a:solidFill>
+                  <a:srgbClr val="2B2B2B"/>
+                </a:solidFill>
+                <a:latin typeface="Calibri"/>
+              </a:rPr>
+              <a:t> · Convierta cada casilla en rojo o parcial en un </a:t>
+            </a:r>
+            <a:r>
+              <a:rPr sz="1600" b="1" i="0">
+                <a:solidFill>
+                  <a:srgbClr val="2B2B2B"/>
+                </a:solidFill>
+                <a:latin typeface="Calibri"/>
+              </a:rPr>
+              <a:t>gap con responsable</a:t>
+            </a:r>
+            <a:r>
+              <a:rPr sz="1600" b="0" i="0">
+                <a:solidFill>
+                  <a:srgbClr val="2B2B2B"/>
+                </a:solidFill>
+                <a:latin typeface="Calibri"/>
+              </a:rPr>
+              <a:t> y ordénelos por impacto.</a:t>
+            </a:r>
+          </a:p>
+          <a:p>
+            <a:pPr>
+              <a:spcAft>
+                <a:spcPts val="1000"/>
+              </a:spcAft>
+            </a:pPr>
+            <a:r>
+              <a:rPr sz="1600" b="0" i="0">
+                <a:solidFill>
+                  <a:srgbClr val="2B2B2B"/>
+                </a:solidFill>
+                <a:latin typeface="Calibri"/>
+              </a:rPr>
+              <a:t>–   </a:t>
+            </a:r>
+            <a:r>
+              <a:rPr sz="1600" b="1" i="0">
+                <a:solidFill>
+                  <a:srgbClr val="2B2B2B"/>
+                </a:solidFill>
+                <a:latin typeface="Calibri"/>
+              </a:rPr>
+              <a:t>Paso 5</a:t>
+            </a:r>
+            <a:r>
+              <a:rPr sz="1600" b="0" i="0">
+                <a:solidFill>
+                  <a:srgbClr val="2B2B2B"/>
+                </a:solidFill>
+                <a:latin typeface="Calibri"/>
+              </a:rPr>
+              <a:t> · Termine el bosquejo del </a:t>
+            </a:r>
+            <a:r>
+              <a:rPr sz="1600" b="1" i="0">
+                <a:solidFill>
+                  <a:srgbClr val="2B2B2B"/>
+                </a:solidFill>
+                <a:latin typeface="Calibri"/>
+              </a:rPr>
+              <a:t>cronograma</a:t>
+            </a:r>
+            <a:r>
+              <a:rPr sz="1600" b="0" i="0">
+                <a:solidFill>
+                  <a:srgbClr val="2B2B2B"/>
+                </a:solidFill>
+                <a:latin typeface="Calibri"/>
+              </a:rPr>
+              <a:t> con las fases que falten, empezando por la gestión de permisos.</a:t>
+            </a:r>
+          </a:p>
+          <a:p>
+            <a:pPr>
+              <a:spcAft>
+                <a:spcPts val="1000"/>
+              </a:spcAft>
+            </a:pPr>
+            <a:r>
+              <a:rPr sz="1600" b="0" i="0">
+                <a:solidFill>
+                  <a:srgbClr val="2B2B2B"/>
+                </a:solidFill>
+                <a:latin typeface="Calibri"/>
+              </a:rPr>
+              <a:t>–   </a:t>
+            </a:r>
+            <a:r>
+              <a:rPr sz="1600" b="1" i="0">
+                <a:solidFill>
+                  <a:srgbClr val="2B2B2B"/>
+                </a:solidFill>
+                <a:latin typeface="Calibri"/>
+              </a:rPr>
+              <a:t>En clase, sin falta:</a:t>
+            </a:r>
+            <a:r>
+              <a:rPr sz="1600" b="0" i="0">
+                <a:solidFill>
+                  <a:srgbClr val="2B2B2B"/>
+                </a:solidFill>
+                <a:latin typeface="Calibri"/>
+              </a:rPr>
+              <a:t> los </a:t>
+            </a:r>
+            <a:r>
+              <a:rPr sz="1600" b="1" i="0">
+                <a:solidFill>
+                  <a:srgbClr val="2B2B2B"/>
+                </a:solidFill>
+                <a:latin typeface="Calibri"/>
+              </a:rPr>
+              <a:t>pasos 1 a 4</a:t>
+            </a:r>
+            <a:r>
+              <a:rPr sz="1600" b="0" i="0">
+                <a:solidFill>
+                  <a:srgbClr val="2B2B2B"/>
+                </a:solidFill>
+                <a:latin typeface="Calibri"/>
+              </a:rPr>
+              <a:t>. Del 5 en adelante puede quedar en trabajo autónomo, pero antes de la próxima sesión.</a:t>
+            </a:r>
+          </a:p>
+        </p:txBody>
+      </p:sp>
+      <p:sp>
+        <p:nvSpPr>
+          <p:cNvPr id="6" name="TextBox 5"/>
           <p:cNvSpPr txBox="1"/>
           <p:nvPr/>
         </p:nvSpPr>
@@ -6591,7 +6596,7 @@
                 </a:solidFill>
                 <a:latin typeface="Calibri"/>
               </a:rPr>
-              <a:t>Checklist de autoevaluación antes de entregar</a:t>
+              <a:t>TALLER · cómo se revisa y dónde se entrega</a:t>
             </a:r>
           </a:p>
         </p:txBody>
@@ -6604,8 +6609,8 @@
         </p:nvSpPr>
         <p:spPr>
           <a:xfrm>
-            <a:off x="640080" y="1691639"/>
-            <a:ext cx="10911535" cy="4617720"/>
+            <a:off x="640080" y="1280160"/>
+            <a:ext cx="10911535" cy="411480"/>
           </a:xfrm>
           <a:prstGeom prst="rect">
             <a:avLst/>
@@ -6618,6 +6623,41 @@
           </a:bodyPr>
           <a:lstStyle/>
           <a:p>
+            <a:pPr algn="ctr"/>
+            <a:r>
+              <a:rPr sz="1500" b="0" i="0">
+                <a:solidFill>
+                  <a:srgbClr val="2B2B2B"/>
+                </a:solidFill>
+                <a:latin typeface="Calibri"/>
+              </a:rPr>
+              <a:t>Matriz de coherencia y lista de gaps</a:t>
+            </a:r>
+          </a:p>
+        </p:txBody>
+      </p:sp>
+      <p:sp>
+        <p:nvSpPr>
+          <p:cNvPr id="5" name="TextBox 4"/>
+          <p:cNvSpPr txBox="1"/>
+          <p:nvPr/>
+        </p:nvSpPr>
+        <p:spPr>
+          <a:xfrm>
+            <a:off x="640080" y="2011679"/>
+            <a:ext cx="10911535" cy="4297680"/>
+          </a:xfrm>
+          <a:prstGeom prst="rect">
+            <a:avLst/>
+          </a:prstGeom>
+          <a:noFill/>
+        </p:spPr>
+        <p:txBody>
+          <a:bodyPr wrap="square" anchor="t" lIns="0" rIns="0" tIns="0" bIns="0">
+            <a:spAutoFit/>
+          </a:bodyPr>
+          <a:lstStyle/>
+          <a:p>
             <a:pPr>
               <a:spcAft>
                 <a:spcPts val="1000"/>
@@ -6630,7 +6670,7 @@
                 </a:solidFill>
                 <a:latin typeface="Calibri"/>
               </a:rPr>
-              <a:t>–   Todo el anteproyecto está en </a:t>
+              <a:t>–   </a:t>
             </a:r>
             <a:r>
               <a:rPr sz="1600" b="1" i="0">
@@ -6639,7 +6679,7 @@
                 </a:solidFill>
                 <a:latin typeface="Calibri"/>
               </a:rPr>
-              <a:t>un solo archivo</a:t>
+              <a:t>Quedó bien si</a:t>
             </a:r>
             <a:r>
               <a:rPr sz="1600" b="0" i="0">
@@ -6648,7 +6688,82 @@
                 </a:solidFill>
                 <a:latin typeface="Calibri"/>
               </a:rPr>
-              <a:t>, con índice automático y encabezados bien aplicados.</a:t>
+              <a:t> —compruébelo usted antes de cerrar el documento—:</a:t>
+            </a:r>
+          </a:p>
+          <a:p>
+            <a:pPr lvl="1">
+              <a:spcAft>
+                <a:spcPts val="600"/>
+              </a:spcAft>
+            </a:pPr>
+            <a:r>
+              <a:rPr sz="1500" b="0" i="0">
+                <a:solidFill>
+                  <a:srgbClr val="2B2B2B"/>
+                </a:solidFill>
+                <a:latin typeface="Calibri"/>
+              </a:rPr>
+              <a:t>●   </a:t>
+            </a:r>
+            <a:r>
+              <a:rPr sz="1500" b="1" i="0">
+                <a:solidFill>
+                  <a:srgbClr val="2B2B2B"/>
+                </a:solidFill>
+                <a:latin typeface="Calibri"/>
+              </a:rPr>
+              <a:t>Ningún gap queda sin responsable.</a:t>
+            </a:r>
+          </a:p>
+          <a:p>
+            <a:pPr lvl="1">
+              <a:spcAft>
+                <a:spcPts val="600"/>
+              </a:spcAft>
+            </a:pPr>
+            <a:r>
+              <a:rPr sz="1500" b="0" i="0">
+                <a:solidFill>
+                  <a:srgbClr val="2B2B2B"/>
+                </a:solidFill>
+                <a:latin typeface="Calibri"/>
+              </a:rPr>
+              <a:t>●   Las </a:t>
+            </a:r>
+            <a:r>
+              <a:rPr sz="1500" b="1" i="0">
+                <a:solidFill>
+                  <a:srgbClr val="2B2B2B"/>
+                </a:solidFill>
+                <a:latin typeface="Calibri"/>
+              </a:rPr>
+              <a:t>ocho secciones</a:t>
+            </a:r>
+            <a:r>
+              <a:rPr sz="1500" b="0" i="0">
+                <a:solidFill>
+                  <a:srgbClr val="2B2B2B"/>
+                </a:solidFill>
+                <a:latin typeface="Calibri"/>
+              </a:rPr>
+              <a:t> tienen casilla marcada.</a:t>
+            </a:r>
+          </a:p>
+          <a:p>
+            <a:pPr lvl="1">
+              <a:spcAft>
+                <a:spcPts val="600"/>
+              </a:spcAft>
+            </a:pPr>
+            <a:r>
+              <a:rPr sz="1500" b="0" i="0">
+                <a:solidFill>
+                  <a:srgbClr val="2B2B2B"/>
+                </a:solidFill>
+                <a:latin typeface="Calibri"/>
+              </a:rPr>
+              <a:t>●   Cada «sí» se puede sustentar señalando la página.</a:t>
             </a:r>
           </a:p>
           <a:p>
@@ -6664,7 +6779,7 @@
                 </a:solidFill>
                 <a:latin typeface="Calibri"/>
               </a:rPr>
-              <a:t>–   El documento se lee con </a:t>
+              <a:t>–   </a:t>
             </a:r>
             <a:r>
               <a:rPr sz="1600" b="1" i="0">
@@ -6673,7 +6788,7 @@
                 </a:solidFill>
                 <a:latin typeface="Calibri"/>
               </a:rPr>
-              <a:t>una sola voz</a:t>
+              <a:t>Plan B:</a:t>
             </a:r>
             <a:r>
               <a:rPr sz="1600" b="0" i="0">
@@ -6682,7 +6797,25 @@
                 </a:solidFill>
                 <a:latin typeface="Calibri"/>
               </a:rPr>
-              <a:t> gramatical de principio a fin.</a:t>
+              <a:t> Si una sección no existe todavía, márquela en rojo y siga: el producto de hoy es </a:t>
+            </a:r>
+            <a:r>
+              <a:rPr sz="1600" b="1" i="0">
+                <a:solidFill>
+                  <a:srgbClr val="2B2B2B"/>
+                </a:solidFill>
+                <a:latin typeface="Calibri"/>
+              </a:rPr>
+              <a:t>saber qué falta</a:t>
+            </a:r>
+            <a:r>
+              <a:rPr sz="1600" b="0" i="0">
+                <a:solidFill>
+                  <a:srgbClr val="2B2B2B"/>
+                </a:solidFill>
+                <a:latin typeface="Calibri"/>
+              </a:rPr>
+              <a:t>, no taparlo.</a:t>
             </a:r>
           </a:p>
           <a:p>
@@ -6698,7 +6831,7 @@
                 </a:solidFill>
                 <a:latin typeface="Calibri"/>
               </a:rPr>
-              <a:t>–   Aparece </a:t>
+              <a:t>–   </a:t>
             </a:r>
             <a:r>
               <a:rPr sz="1600" b="1" i="0">
@@ -6707,7 +6840,7 @@
                 </a:solidFill>
                 <a:latin typeface="Calibri"/>
               </a:rPr>
-              <a:t>una sola versión</a:t>
+              <a:t>Entrega:</a:t>
             </a:r>
             <a:r>
               <a:rPr sz="1600" b="0" i="0">
@@ -6716,7 +6849,43 @@
                 </a:solidFill>
                 <a:latin typeface="Calibri"/>
               </a:rPr>
-              <a:t> de la pregunta de investigación en todo el texto.</a:t>
+              <a:t> suba `S10_IntegracionViabilidad_Apellidos` (Google Doc o PDF) como </a:t>
+            </a:r>
+            <a:r>
+              <a:rPr sz="1600" b="1" i="0">
+                <a:solidFill>
+                  <a:srgbClr val="2B2B2B"/>
+                </a:solidFill>
+                <a:latin typeface="Calibri"/>
+              </a:rPr>
+              <a:t>ACA FINAL</a:t>
+            </a:r>
+            <a:r>
+              <a:rPr sz="1600" b="0" i="0">
+                <a:solidFill>
+                  <a:srgbClr val="2B2B2B"/>
+                </a:solidFill>
+                <a:latin typeface="Calibri"/>
+              </a:rPr>
+              <a:t> —tarea, 42%— en </a:t>
+            </a:r>
+            <a:r>
+              <a:rPr sz="1600" b="1" i="0">
+                <a:solidFill>
+                  <a:srgbClr val="2B2B2B"/>
+                </a:solidFill>
+                <a:latin typeface="Calibri"/>
+              </a:rPr>
+              <a:t>CDigital</a:t>
+            </a:r>
+            <a:r>
+              <a:rPr sz="1600" b="0" i="0">
+                <a:solidFill>
+                  <a:srgbClr val="2B2B2B"/>
+                </a:solidFill>
+                <a:latin typeface="Calibri"/>
+              </a:rPr>
+              <a:t>.</a:t>
             </a:r>
           </a:p>
           <a:p>
@@ -6732,7 +6901,7 @@
                 </a:solidFill>
                 <a:latin typeface="Calibri"/>
               </a:rPr>
-              <a:t>–   Los </a:t>
+              <a:t>–   </a:t>
             </a:r>
             <a:r>
               <a:rPr sz="1600" b="1" i="0">
@@ -6741,7 +6910,7 @@
                 </a:solidFill>
                 <a:latin typeface="Calibri"/>
               </a:rPr>
-              <a:t>objetivos específicos</a:t>
+              <a:t>Verifique el estado:</a:t>
             </a:r>
             <a:r>
               <a:rPr sz="1600" b="0" i="0">
@@ -6750,184 +6919,14 @@
                 </a:solidFill>
                 <a:latin typeface="Calibri"/>
               </a:rPr>
-              <a:t> siguen alineados con el método y con el instrumento propuesto.</a:t>
-            </a:r>
-          </a:p>
-          <a:p>
-            <a:pPr>
-              <a:spcAft>
-                <a:spcPts val="1000"/>
-              </a:spcAft>
-            </a:pPr>
-            <a:r>
-              <a:rPr sz="1600" b="0" i="0">
-                <a:solidFill>
-                  <a:srgbClr val="2B2B2B"/>
-                </a:solidFill>
-                <a:latin typeface="Calibri"/>
-              </a:rPr>
-              <a:t>–   El </a:t>
-            </a:r>
-            <a:r>
-              <a:rPr sz="1600" b="1" i="0">
-                <a:solidFill>
-                  <a:srgbClr val="2B2B2B"/>
-                </a:solidFill>
-                <a:latin typeface="Calibri"/>
-              </a:rPr>
-              <a:t>cronograma</a:t>
-            </a:r>
-            <a:r>
-              <a:rPr sz="1600" b="0" i="0">
-                <a:solidFill>
-                  <a:srgbClr val="2B2B2B"/>
-                </a:solidFill>
-                <a:latin typeface="Calibri"/>
-              </a:rPr>
-              <a:t> incluye la fase de gestión de avales y permisos, no solo la recolección.</a:t>
-            </a:r>
-          </a:p>
-          <a:p>
-            <a:pPr>
-              <a:spcAft>
-                <a:spcPts val="1000"/>
-              </a:spcAft>
-            </a:pPr>
-            <a:r>
-              <a:rPr sz="1600" b="0" i="0">
-                <a:solidFill>
-                  <a:srgbClr val="2B2B2B"/>
-                </a:solidFill>
-                <a:latin typeface="Calibri"/>
-              </a:rPr>
-              <a:t>–   Cada actividad del cronograma tiene un </a:t>
-            </a:r>
-            <a:r>
-              <a:rPr sz="1600" b="1" i="0">
-                <a:solidFill>
-                  <a:srgbClr val="2B2B2B"/>
-                </a:solidFill>
-                <a:latin typeface="Calibri"/>
-              </a:rPr>
-              <a:t>producto verificable</a:t>
-            </a:r>
-            <a:r>
-              <a:rPr sz="1600" b="0" i="0">
-                <a:solidFill>
-                  <a:srgbClr val="2B2B2B"/>
-                </a:solidFill>
-                <a:latin typeface="Calibri"/>
-              </a:rPr>
-              <a:t> y un responsable.</a:t>
-            </a:r>
-          </a:p>
-          <a:p>
-            <a:pPr>
-              <a:spcAft>
-                <a:spcPts val="1000"/>
-              </a:spcAft>
-            </a:pPr>
-            <a:r>
-              <a:rPr sz="1600" b="0" i="0">
-                <a:solidFill>
-                  <a:srgbClr val="2B2B2B"/>
-                </a:solidFill>
-                <a:latin typeface="Calibri"/>
-              </a:rPr>
-              <a:t>–   La sección de </a:t>
-            </a:r>
-            <a:r>
-              <a:rPr sz="1600" b="1" i="0">
-                <a:solidFill>
-                  <a:srgbClr val="2B2B2B"/>
-                </a:solidFill>
-                <a:latin typeface="Calibri"/>
-              </a:rPr>
-              <a:t>viabilidad</a:t>
-            </a:r>
-            <a:r>
-              <a:rPr sz="1600" b="0" i="0">
-                <a:solidFill>
-                  <a:srgbClr val="2B2B2B"/>
-                </a:solidFill>
-                <a:latin typeface="Calibri"/>
-              </a:rPr>
-              <a:t> responde los cuatro frentes: técnica, acceso, tiempo y ética-legal.</a:t>
-            </a:r>
-          </a:p>
-          <a:p>
-            <a:pPr>
-              <a:spcAft>
-                <a:spcPts val="1000"/>
-              </a:spcAft>
-            </a:pPr>
-            <a:r>
-              <a:rPr sz="1600" b="0" i="0">
-                <a:solidFill>
-                  <a:srgbClr val="2B2B2B"/>
-                </a:solidFill>
-                <a:latin typeface="Calibri"/>
-              </a:rPr>
-              <a:t>–   Las </a:t>
-            </a:r>
-            <a:r>
-              <a:rPr sz="1600" b="1" i="0">
-                <a:solidFill>
-                  <a:srgbClr val="2B2B2B"/>
-                </a:solidFill>
-                <a:latin typeface="Calibri"/>
-              </a:rPr>
-              <a:t>correcciones de los avances anteriores</a:t>
-            </a:r>
-            <a:r>
-              <a:rPr sz="1600" b="0" i="0">
-                <a:solidFill>
-                  <a:srgbClr val="2B2B2B"/>
-                </a:solidFill>
-                <a:latin typeface="Calibri"/>
-              </a:rPr>
-              <a:t> están efectivamente incorporadas en el texto.</a:t>
-            </a:r>
-          </a:p>
-          <a:p>
-            <a:pPr>
-              <a:spcAft>
-                <a:spcPts val="1000"/>
-              </a:spcAft>
-            </a:pPr>
-            <a:r>
-              <a:rPr sz="1600" b="0" i="0">
-                <a:solidFill>
-                  <a:srgbClr val="2B2B2B"/>
-                </a:solidFill>
-                <a:latin typeface="Calibri"/>
-              </a:rPr>
-              <a:t>–   Mi lista de </a:t>
-            </a:r>
-            <a:r>
-              <a:rPr sz="1600" b="1" i="0">
-                <a:solidFill>
-                  <a:srgbClr val="2B2B2B"/>
-                </a:solidFill>
-                <a:latin typeface="Calibri"/>
-              </a:rPr>
-              <a:t>gaps</a:t>
-            </a:r>
-            <a:r>
-              <a:rPr sz="1600" b="0" i="0">
-                <a:solidFill>
-                  <a:srgbClr val="2B2B2B"/>
-                </a:solidFill>
-                <a:latin typeface="Calibri"/>
-              </a:rPr>
-              <a:t> está priorizada por impacto y cada uno tiene un responsable con fecha.</a:t>
-            </a:r>
-          </a:p>
-        </p:txBody>
-      </p:sp>
-      <p:sp>
-        <p:nvSpPr>
-          <p:cNvPr id="5" name="TextBox 4"/>
+              <a:t> *subido* no es lo mismo que *entregado*. Lo que no esté en el aula, no está entregado.</a:t>
+            </a:r>
+          </a:p>
+        </p:txBody>
+      </p:sp>
+      <p:sp>
+        <p:nvSpPr>
+          <p:cNvPr id="6" name="TextBox 5"/>
           <p:cNvSpPr txBox="1"/>
           <p:nvPr/>
         </p:nvSpPr>
@@ -7060,7 +7059,7 @@
                 </a:solidFill>
                 <a:latin typeface="Calibri"/>
               </a:rPr>
-              <a:t>Trabajo autónomo y qué viene después</a:t>
+              <a:t>Checklist de autoevaluación antes de entregar</a:t>
             </a:r>
           </a:p>
         </p:txBody>
@@ -7099,7 +7098,7 @@
                 </a:solidFill>
                 <a:latin typeface="Calibri"/>
               </a:rPr>
-              <a:t>–   </a:t>
+              <a:t>–   Todo el anteproyecto está en </a:t>
             </a:r>
             <a:r>
               <a:rPr sz="1600" b="1" i="0">
@@ -7108,125 +7107,16 @@
                 </a:solidFill>
                 <a:latin typeface="Calibri"/>
               </a:rPr>
-              <a:t>Autónomo de esta semana:</a:t>
-            </a:r>
-          </a:p>
-          <a:p>
-            <a:pPr lvl="1">
-              <a:spcAft>
-                <a:spcPts val="600"/>
-              </a:spcAft>
-            </a:pPr>
-            <a:r>
-              <a:rPr sz="1500" b="0" i="0">
-                <a:solidFill>
-                  <a:srgbClr val="2B2B2B"/>
-                </a:solidFill>
-                <a:latin typeface="Calibri"/>
-              </a:rPr>
-              <a:t>●   Cierre los gaps en </a:t>
-            </a:r>
-            <a:r>
-              <a:rPr sz="1500" b="1" i="0">
-                <a:solidFill>
-                  <a:srgbClr val="2B2B2B"/>
-                </a:solidFill>
-                <a:latin typeface="Calibri"/>
-              </a:rPr>
-              <a:t>orden de impacto</a:t>
-            </a:r>
-            <a:r>
-              <a:rPr sz="1500" b="0" i="0">
-                <a:solidFill>
-                  <a:srgbClr val="2B2B2B"/>
-                </a:solidFill>
-                <a:latin typeface="Calibri"/>
-              </a:rPr>
-              <a:t>: primero los que rompen el hilo, después los de forma.</a:t>
-            </a:r>
-          </a:p>
-          <a:p>
-            <a:pPr lvl="1">
-              <a:spcAft>
-                <a:spcPts val="600"/>
-              </a:spcAft>
-            </a:pPr>
-            <a:r>
-              <a:rPr sz="1500" b="0" i="0">
-                <a:solidFill>
-                  <a:srgbClr val="2B2B2B"/>
-                </a:solidFill>
-                <a:latin typeface="Calibri"/>
-              </a:rPr>
-              <a:t>●   Termine el </a:t>
-            </a:r>
-            <a:r>
-              <a:rPr sz="1500" b="1" i="0">
-                <a:solidFill>
-                  <a:srgbClr val="2B2B2B"/>
-                </a:solidFill>
-                <a:latin typeface="Calibri"/>
-              </a:rPr>
-              <a:t>cronograma</a:t>
-            </a:r>
-            <a:r>
-              <a:rPr sz="1500" b="0" i="0">
-                <a:solidFill>
-                  <a:srgbClr val="2B2B2B"/>
-                </a:solidFill>
-                <a:latin typeface="Calibri"/>
-              </a:rPr>
-              <a:t> completo y, si el formato lo pide, el cuadro de recursos o presupuesto.</a:t>
-            </a:r>
-          </a:p>
-          <a:p>
-            <a:pPr lvl="1">
-              <a:spcAft>
-                <a:spcPts val="600"/>
-              </a:spcAft>
-            </a:pPr>
-            <a:r>
-              <a:rPr sz="1500" b="0" i="0">
-                <a:solidFill>
-                  <a:srgbClr val="2B2B2B"/>
-                </a:solidFill>
-                <a:latin typeface="Calibri"/>
-              </a:rPr>
-              <a:t>●   Vuelva a leer el documento de corrido </a:t>
-            </a:r>
-            <a:r>
-              <a:rPr sz="1500" b="1" i="0">
-                <a:solidFill>
-                  <a:srgbClr val="2B2B2B"/>
-                </a:solidFill>
-                <a:latin typeface="Calibri"/>
-              </a:rPr>
-              <a:t>después</a:t>
-            </a:r>
-            <a:r>
-              <a:rPr sz="1500" b="0" i="0">
-                <a:solidFill>
-                  <a:srgbClr val="2B2B2B"/>
-                </a:solidFill>
-                <a:latin typeface="Calibri"/>
-              </a:rPr>
-              <a:t> de aplicar los cambios: cada corrección puede abrir una costura nueva.</a:t>
-            </a:r>
-          </a:p>
-          <a:p>
-            <a:pPr lvl="1">
-              <a:spcAft>
-                <a:spcPts val="600"/>
-              </a:spcAft>
-            </a:pPr>
-            <a:r>
-              <a:rPr sz="1500" b="0" i="0">
-                <a:solidFill>
-                  <a:srgbClr val="2B2B2B"/>
-                </a:solidFill>
-                <a:latin typeface="Calibri"/>
-              </a:rPr>
-              <a:t>●   Guarde una versión con nombre y fecha antes de seguir editando: le servirá para comparar.</a:t>
+              <a:t>un solo archivo</a:t>
+            </a:r>
+            <a:r>
+              <a:rPr sz="1600" b="0" i="0">
+                <a:solidFill>
+                  <a:srgbClr val="2B2B2B"/>
+                </a:solidFill>
+                <a:latin typeface="Calibri"/>
+              </a:rPr>
+              <a:t>, con índice automático y encabezados bien aplicados.</a:t>
             </a:r>
           </a:p>
           <a:p>
@@ -7242,7 +7132,7 @@
                 </a:solidFill>
                 <a:latin typeface="Calibri"/>
               </a:rPr>
-              <a:t>–   </a:t>
+              <a:t>–   El documento se lee con </a:t>
             </a:r>
             <a:r>
               <a:rPr sz="1600" b="1" i="0">
@@ -7251,109 +7141,254 @@
                 </a:solidFill>
                 <a:latin typeface="Calibri"/>
               </a:rPr>
-              <a:t>La próxima es la última sesión sincrónica de contenido del curso:</a:t>
-            </a:r>
-          </a:p>
-          <a:p>
-            <a:pPr lvl="1">
+              <a:t>una sola voz</a:t>
+            </a:r>
+            <a:r>
+              <a:rPr sz="1600" b="0" i="0">
+                <a:solidFill>
+                  <a:srgbClr val="2B2B2B"/>
+                </a:solidFill>
+                <a:latin typeface="Calibri"/>
+              </a:rPr>
+              <a:t> gramatical de principio a fin.</a:t>
+            </a:r>
+          </a:p>
+          <a:p>
+            <a:pPr>
               <a:spcAft>
-                <a:spcPts val="600"/>
+                <a:spcPts val="1000"/>
               </a:spcAft>
             </a:pPr>
             <a:r>
-              <a:rPr sz="1500" b="0" i="0">
-                <a:solidFill>
-                  <a:srgbClr val="2B2B2B"/>
-                </a:solidFill>
-                <a:latin typeface="Calibri"/>
-              </a:rPr>
-              <a:t>●   </a:t>
-            </a:r>
-            <a:r>
-              <a:rPr sz="1500" b="1" i="0">
-                <a:solidFill>
-                  <a:srgbClr val="2B2B2B"/>
-                </a:solidFill>
-                <a:latin typeface="Calibri"/>
-              </a:rPr>
-              <a:t>Verificación de la integración final</a:t>
-            </a:r>
-            <a:r>
-              <a:rPr sz="1500" b="0" i="0">
-                <a:solidFill>
-                  <a:srgbClr val="2B2B2B"/>
-                </a:solidFill>
-                <a:latin typeface="Calibri"/>
-              </a:rPr>
-              <a:t> con checklist en mano.</a:t>
-            </a:r>
-          </a:p>
-          <a:p>
-            <a:pPr lvl="1">
+              <a:rPr sz="1600" b="0" i="0">
+                <a:solidFill>
+                  <a:srgbClr val="2B2B2B"/>
+                </a:solidFill>
+                <a:latin typeface="Calibri"/>
+              </a:rPr>
+              <a:t>–   Aparece </a:t>
+            </a:r>
+            <a:r>
+              <a:rPr sz="1600" b="1" i="0">
+                <a:solidFill>
+                  <a:srgbClr val="2B2B2B"/>
+                </a:solidFill>
+                <a:latin typeface="Calibri"/>
+              </a:rPr>
+              <a:t>una sola versión</a:t>
+            </a:r>
+            <a:r>
+              <a:rPr sz="1600" b="0" i="0">
+                <a:solidFill>
+                  <a:srgbClr val="2B2B2B"/>
+                </a:solidFill>
+                <a:latin typeface="Calibri"/>
+              </a:rPr>
+              <a:t> de la pregunta de investigación en todo el texto.</a:t>
+            </a:r>
+          </a:p>
+          <a:p>
+            <a:pPr>
               <a:spcAft>
-                <a:spcPts val="600"/>
+                <a:spcPts val="1000"/>
               </a:spcAft>
             </a:pPr>
             <a:r>
-              <a:rPr sz="1500" b="0" i="0">
-                <a:solidFill>
-                  <a:srgbClr val="2B2B2B"/>
-                </a:solidFill>
-                <a:latin typeface="Calibri"/>
-              </a:rPr>
-              <a:t>●   </a:t>
-            </a:r>
-            <a:r>
-              <a:rPr sz="1500" b="1" i="0">
-                <a:solidFill>
-                  <a:srgbClr val="2B2B2B"/>
-                </a:solidFill>
-                <a:latin typeface="Calibri"/>
-              </a:rPr>
-              <a:t>Coevaluación y autoevaluación</a:t>
-            </a:r>
-            <a:r>
-              <a:rPr sz="1500" b="0" i="0">
-                <a:solidFill>
-                  <a:srgbClr val="2B2B2B"/>
-                </a:solidFill>
-                <a:latin typeface="Calibri"/>
-              </a:rPr>
-              <a:t>: cómo dar y recibir retroalimentación con criterios, y qué se diligencia en CDigital.</a:t>
-            </a:r>
-          </a:p>
-          <a:p>
-            <a:pPr lvl="1">
+              <a:rPr sz="1600" b="0" i="0">
+                <a:solidFill>
+                  <a:srgbClr val="2B2B2B"/>
+                </a:solidFill>
+                <a:latin typeface="Calibri"/>
+              </a:rPr>
+              <a:t>–   Los </a:t>
+            </a:r>
+            <a:r>
+              <a:rPr sz="1600" b="1" i="0">
+                <a:solidFill>
+                  <a:srgbClr val="2B2B2B"/>
+                </a:solidFill>
+                <a:latin typeface="Calibri"/>
+              </a:rPr>
+              <a:t>objetivos específicos</a:t>
+            </a:r>
+            <a:r>
+              <a:rPr sz="1600" b="0" i="0">
+                <a:solidFill>
+                  <a:srgbClr val="2B2B2B"/>
+                </a:solidFill>
+                <a:latin typeface="Calibri"/>
+              </a:rPr>
+              <a:t> siguen alineados con el método y con el instrumento propuesto.</a:t>
+            </a:r>
+          </a:p>
+          <a:p>
+            <a:pPr>
               <a:spcAft>
-                <a:spcPts val="600"/>
+                <a:spcPts val="1000"/>
               </a:spcAft>
             </a:pPr>
             <a:r>
-              <a:rPr sz="1500" b="0" i="0">
-                <a:solidFill>
-                  <a:srgbClr val="2B2B2B"/>
-                </a:solidFill>
-                <a:latin typeface="Calibri"/>
-              </a:rPr>
-              <a:t>●   Traiga el documento </a:t>
-            </a:r>
-            <a:r>
-              <a:rPr sz="1500" b="1" i="0">
-                <a:solidFill>
-                  <a:srgbClr val="2B2B2B"/>
-                </a:solidFill>
-                <a:latin typeface="Calibri"/>
-              </a:rPr>
-              <a:t>integrado</a:t>
-            </a:r>
-            <a:r>
-              <a:rPr sz="1500" b="0" i="0">
-                <a:solidFill>
-                  <a:srgbClr val="2B2B2B"/>
-                </a:solidFill>
-                <a:latin typeface="Calibri"/>
-              </a:rPr>
-              <a:t>: en esa sesión lo van a leer sus compañeros.</a:t>
+              <a:rPr sz="1600" b="0" i="0">
+                <a:solidFill>
+                  <a:srgbClr val="2B2B2B"/>
+                </a:solidFill>
+                <a:latin typeface="Calibri"/>
+              </a:rPr>
+              <a:t>–   El </a:t>
+            </a:r>
+            <a:r>
+              <a:rPr sz="1600" b="1" i="0">
+                <a:solidFill>
+                  <a:srgbClr val="2B2B2B"/>
+                </a:solidFill>
+                <a:latin typeface="Calibri"/>
+              </a:rPr>
+              <a:t>cronograma</a:t>
+            </a:r>
+            <a:r>
+              <a:rPr sz="1600" b="0" i="0">
+                <a:solidFill>
+                  <a:srgbClr val="2B2B2B"/>
+                </a:solidFill>
+                <a:latin typeface="Calibri"/>
+              </a:rPr>
+              <a:t> incluye la fase de gestión de avales y permisos, no solo la recolección.</a:t>
+            </a:r>
+          </a:p>
+          <a:p>
+            <a:pPr>
+              <a:spcAft>
+                <a:spcPts val="1000"/>
+              </a:spcAft>
+            </a:pPr>
+            <a:r>
+              <a:rPr sz="1600" b="0" i="0">
+                <a:solidFill>
+                  <a:srgbClr val="2B2B2B"/>
+                </a:solidFill>
+                <a:latin typeface="Calibri"/>
+              </a:rPr>
+              <a:t>–   Cada actividad del cronograma tiene un </a:t>
+            </a:r>
+            <a:r>
+              <a:rPr sz="1600" b="1" i="0">
+                <a:solidFill>
+                  <a:srgbClr val="2B2B2B"/>
+                </a:solidFill>
+                <a:latin typeface="Calibri"/>
+              </a:rPr>
+              <a:t>producto verificable</a:t>
+            </a:r>
+            <a:r>
+              <a:rPr sz="1600" b="0" i="0">
+                <a:solidFill>
+                  <a:srgbClr val="2B2B2B"/>
+                </a:solidFill>
+                <a:latin typeface="Calibri"/>
+              </a:rPr>
+              <a:t> y un responsable.</a:t>
+            </a:r>
+          </a:p>
+          <a:p>
+            <a:pPr>
+              <a:spcAft>
+                <a:spcPts val="1000"/>
+              </a:spcAft>
+            </a:pPr>
+            <a:r>
+              <a:rPr sz="1600" b="0" i="0">
+                <a:solidFill>
+                  <a:srgbClr val="2B2B2B"/>
+                </a:solidFill>
+                <a:latin typeface="Calibri"/>
+              </a:rPr>
+              <a:t>–   La sección de </a:t>
+            </a:r>
+            <a:r>
+              <a:rPr sz="1600" b="1" i="0">
+                <a:solidFill>
+                  <a:srgbClr val="2B2B2B"/>
+                </a:solidFill>
+                <a:latin typeface="Calibri"/>
+              </a:rPr>
+              <a:t>viabilidad</a:t>
+            </a:r>
+            <a:r>
+              <a:rPr sz="1600" b="0" i="0">
+                <a:solidFill>
+                  <a:srgbClr val="2B2B2B"/>
+                </a:solidFill>
+                <a:latin typeface="Calibri"/>
+              </a:rPr>
+              <a:t> responde los cuatro frentes: técnica, acceso, tiempo y ética-legal.</a:t>
+            </a:r>
+          </a:p>
+          <a:p>
+            <a:pPr>
+              <a:spcAft>
+                <a:spcPts val="1000"/>
+              </a:spcAft>
+            </a:pPr>
+            <a:r>
+              <a:rPr sz="1600" b="0" i="0">
+                <a:solidFill>
+                  <a:srgbClr val="2B2B2B"/>
+                </a:solidFill>
+                <a:latin typeface="Calibri"/>
+              </a:rPr>
+              <a:t>–   Las </a:t>
+            </a:r>
+            <a:r>
+              <a:rPr sz="1600" b="1" i="0">
+                <a:solidFill>
+                  <a:srgbClr val="2B2B2B"/>
+                </a:solidFill>
+                <a:latin typeface="Calibri"/>
+              </a:rPr>
+              <a:t>correcciones de los avances anteriores</a:t>
+            </a:r>
+            <a:r>
+              <a:rPr sz="1600" b="0" i="0">
+                <a:solidFill>
+                  <a:srgbClr val="2B2B2B"/>
+                </a:solidFill>
+                <a:latin typeface="Calibri"/>
+              </a:rPr>
+              <a:t> están efectivamente incorporadas en el texto.</a:t>
+            </a:r>
+          </a:p>
+          <a:p>
+            <a:pPr>
+              <a:spcAft>
+                <a:spcPts val="1000"/>
+              </a:spcAft>
+            </a:pPr>
+            <a:r>
+              <a:rPr sz="1600" b="0" i="0">
+                <a:solidFill>
+                  <a:srgbClr val="2B2B2B"/>
+                </a:solidFill>
+                <a:latin typeface="Calibri"/>
+              </a:rPr>
+              <a:t>–   Mi lista de </a:t>
+            </a:r>
+            <a:r>
+              <a:rPr sz="1600" b="1" i="0">
+                <a:solidFill>
+                  <a:srgbClr val="2B2B2B"/>
+                </a:solidFill>
+                <a:latin typeface="Calibri"/>
+              </a:rPr>
+              <a:t>gaps</a:t>
+            </a:r>
+            <a:r>
+              <a:rPr sz="1600" b="0" i="0">
+                <a:solidFill>
+                  <a:srgbClr val="2B2B2B"/>
+                </a:solidFill>
+                <a:latin typeface="Calibri"/>
+              </a:rPr>
+              <a:t> está priorizada por impacto y cada uno tiene un responsable con fecha.</a:t>
             </a:r>
           </a:p>
         </p:txBody>
@@ -7402,6 +7437,1326 @@
 </file>
 
 <file path=ppt/slides/slide17.xml><?xml version="1.0" encoding="utf-8"?>
+<p:sld xmlns:a="http://schemas.openxmlformats.org/drawingml/2006/main" xmlns:p="http://schemas.openxmlformats.org/presentationml/2006/main" xmlns:r="http://schemas.openxmlformats.org/officeDocument/2006/relationships">
+  <p:cSld>
+    <p:bg>
+      <p:bgPr>
+        <a:solidFill>
+          <a:srgbClr val="FFFFFF"/>
+        </a:solidFill>
+        <a:effectLst/>
+      </p:bgPr>
+    </p:bg>
+    <p:spTree>
+      <p:nvGrpSpPr>
+        <p:cNvPr id="1" name=""/>
+        <p:cNvGrpSpPr/>
+        <p:nvPr/>
+      </p:nvGrpSpPr>
+      <p:grpSpPr/>
+      <p:sp>
+        <p:nvSpPr>
+          <p:cNvPr id="2" name="Rectangle 1"/>
+          <p:cNvSpPr/>
+          <p:nvPr/>
+        </p:nvSpPr>
+        <p:spPr>
+          <a:xfrm>
+            <a:off x="0" y="0"/>
+            <a:ext cx="12191695" cy="1188720"/>
+          </a:xfrm>
+          <a:prstGeom prst="rect">
+            <a:avLst/>
+          </a:prstGeom>
+          <a:solidFill>
+            <a:srgbClr val="0C2340"/>
+          </a:solidFill>
+          <a:ln>
+            <a:noFill/>
+          </a:ln>
+          <a:effectLst/>
+        </p:spPr>
+        <p:style>
+          <a:lnRef idx="1">
+            <a:schemeClr val="accent1"/>
+          </a:lnRef>
+          <a:fillRef idx="3">
+            <a:schemeClr val="accent1"/>
+          </a:fillRef>
+          <a:effectRef idx="2">
+            <a:schemeClr val="accent1"/>
+          </a:effectRef>
+          <a:fontRef idx="minor">
+            <a:schemeClr val="lt1"/>
+          </a:fontRef>
+        </p:style>
+        <p:txBody>
+          <a:bodyPr rtlCol="0" anchor="ctr"/>
+          <a:lstStyle/>
+          <a:p>
+            <a:pPr algn="ctr"/>
+          </a:p>
+        </p:txBody>
+      </p:sp>
+      <p:sp>
+        <p:nvSpPr>
+          <p:cNvPr id="3" name="TextBox 2"/>
+          <p:cNvSpPr txBox="1"/>
+          <p:nvPr/>
+        </p:nvSpPr>
+        <p:spPr>
+          <a:xfrm>
+            <a:off x="640080" y="0"/>
+            <a:ext cx="9082735" cy="1188720"/>
+          </a:xfrm>
+          <a:prstGeom prst="rect">
+            <a:avLst/>
+          </a:prstGeom>
+          <a:noFill/>
+        </p:spPr>
+        <p:txBody>
+          <a:bodyPr wrap="square" anchor="ctr" lIns="0" rIns="0" tIns="0" bIns="0">
+            <a:spAutoFit/>
+          </a:bodyPr>
+          <a:lstStyle/>
+          <a:p>
+            <a:pPr algn="ctr"/>
+            <a:r>
+              <a:rPr sz="2600" b="1" i="0">
+                <a:solidFill>
+                  <a:srgbClr val="FFFFFF"/>
+                </a:solidFill>
+                <a:latin typeface="Calibri"/>
+              </a:rPr>
+              <a:t>Trabajo autónomo y qué viene después</a:t>
+            </a:r>
+          </a:p>
+        </p:txBody>
+      </p:sp>
+      <p:sp>
+        <p:nvSpPr>
+          <p:cNvPr id="4" name="TextBox 3"/>
+          <p:cNvSpPr txBox="1"/>
+          <p:nvPr/>
+        </p:nvSpPr>
+        <p:spPr>
+          <a:xfrm>
+            <a:off x="640080" y="1691639"/>
+            <a:ext cx="10911535" cy="4617720"/>
+          </a:xfrm>
+          <a:prstGeom prst="rect">
+            <a:avLst/>
+          </a:prstGeom>
+          <a:noFill/>
+        </p:spPr>
+        <p:txBody>
+          <a:bodyPr wrap="square" anchor="t" lIns="0" rIns="0" tIns="0" bIns="0">
+            <a:spAutoFit/>
+          </a:bodyPr>
+          <a:lstStyle/>
+          <a:p>
+            <a:pPr>
+              <a:spcAft>
+                <a:spcPts val="1000"/>
+              </a:spcAft>
+            </a:pPr>
+            <a:r>
+              <a:rPr sz="1600" b="0" i="0">
+                <a:solidFill>
+                  <a:srgbClr val="2B2B2B"/>
+                </a:solidFill>
+                <a:latin typeface="Calibri"/>
+              </a:rPr>
+              <a:t>–   </a:t>
+            </a:r>
+            <a:r>
+              <a:rPr sz="1600" b="1" i="0">
+                <a:solidFill>
+                  <a:srgbClr val="2B2B2B"/>
+                </a:solidFill>
+                <a:latin typeface="Calibri"/>
+              </a:rPr>
+              <a:t>Autónomo de esta semana:</a:t>
+            </a:r>
+          </a:p>
+          <a:p>
+            <a:pPr lvl="1">
+              <a:spcAft>
+                <a:spcPts val="600"/>
+              </a:spcAft>
+            </a:pPr>
+            <a:r>
+              <a:rPr sz="1500" b="0" i="0">
+                <a:solidFill>
+                  <a:srgbClr val="2B2B2B"/>
+                </a:solidFill>
+                <a:latin typeface="Calibri"/>
+              </a:rPr>
+              <a:t>●   Cierre los gaps en </a:t>
+            </a:r>
+            <a:r>
+              <a:rPr sz="1500" b="1" i="0">
+                <a:solidFill>
+                  <a:srgbClr val="2B2B2B"/>
+                </a:solidFill>
+                <a:latin typeface="Calibri"/>
+              </a:rPr>
+              <a:t>orden de impacto</a:t>
+            </a:r>
+            <a:r>
+              <a:rPr sz="1500" b="0" i="0">
+                <a:solidFill>
+                  <a:srgbClr val="2B2B2B"/>
+                </a:solidFill>
+                <a:latin typeface="Calibri"/>
+              </a:rPr>
+              <a:t>: primero los que rompen el hilo, después los de forma.</a:t>
+            </a:r>
+          </a:p>
+          <a:p>
+            <a:pPr lvl="1">
+              <a:spcAft>
+                <a:spcPts val="600"/>
+              </a:spcAft>
+            </a:pPr>
+            <a:r>
+              <a:rPr sz="1500" b="0" i="0">
+                <a:solidFill>
+                  <a:srgbClr val="2B2B2B"/>
+                </a:solidFill>
+                <a:latin typeface="Calibri"/>
+              </a:rPr>
+              <a:t>●   Termine el </a:t>
+            </a:r>
+            <a:r>
+              <a:rPr sz="1500" b="1" i="0">
+                <a:solidFill>
+                  <a:srgbClr val="2B2B2B"/>
+                </a:solidFill>
+                <a:latin typeface="Calibri"/>
+              </a:rPr>
+              <a:t>cronograma</a:t>
+            </a:r>
+            <a:r>
+              <a:rPr sz="1500" b="0" i="0">
+                <a:solidFill>
+                  <a:srgbClr val="2B2B2B"/>
+                </a:solidFill>
+                <a:latin typeface="Calibri"/>
+              </a:rPr>
+              <a:t> completo y, si el formato lo pide, el cuadro de recursos o presupuesto.</a:t>
+            </a:r>
+          </a:p>
+          <a:p>
+            <a:pPr lvl="1">
+              <a:spcAft>
+                <a:spcPts val="600"/>
+              </a:spcAft>
+            </a:pPr>
+            <a:r>
+              <a:rPr sz="1500" b="0" i="0">
+                <a:solidFill>
+                  <a:srgbClr val="2B2B2B"/>
+                </a:solidFill>
+                <a:latin typeface="Calibri"/>
+              </a:rPr>
+              <a:t>●   Vuelva a leer el documento de corrido </a:t>
+            </a:r>
+            <a:r>
+              <a:rPr sz="1500" b="1" i="0">
+                <a:solidFill>
+                  <a:srgbClr val="2B2B2B"/>
+                </a:solidFill>
+                <a:latin typeface="Calibri"/>
+              </a:rPr>
+              <a:t>después</a:t>
+            </a:r>
+            <a:r>
+              <a:rPr sz="1500" b="0" i="0">
+                <a:solidFill>
+                  <a:srgbClr val="2B2B2B"/>
+                </a:solidFill>
+                <a:latin typeface="Calibri"/>
+              </a:rPr>
+              <a:t> de aplicar los cambios: cada corrección puede abrir una costura nueva.</a:t>
+            </a:r>
+          </a:p>
+          <a:p>
+            <a:pPr lvl="1">
+              <a:spcAft>
+                <a:spcPts val="600"/>
+              </a:spcAft>
+            </a:pPr>
+            <a:r>
+              <a:rPr sz="1500" b="0" i="0">
+                <a:solidFill>
+                  <a:srgbClr val="2B2B2B"/>
+                </a:solidFill>
+                <a:latin typeface="Calibri"/>
+              </a:rPr>
+              <a:t>●   Guarde una versión con nombre y fecha antes de seguir editando: le servirá para comparar.</a:t>
+            </a:r>
+          </a:p>
+          <a:p>
+            <a:pPr>
+              <a:spcAft>
+                <a:spcPts val="1000"/>
+              </a:spcAft>
+            </a:pPr>
+            <a:r>
+              <a:rPr sz="1600" b="0" i="0">
+                <a:solidFill>
+                  <a:srgbClr val="2B2B2B"/>
+                </a:solidFill>
+                <a:latin typeface="Calibri"/>
+              </a:rPr>
+              <a:t>–   </a:t>
+            </a:r>
+            <a:r>
+              <a:rPr sz="1600" b="1" i="0">
+                <a:solidFill>
+                  <a:srgbClr val="2B2B2B"/>
+                </a:solidFill>
+                <a:latin typeface="Calibri"/>
+              </a:rPr>
+              <a:t>La próxima es la última sesión sincrónica de contenido del curso:</a:t>
+            </a:r>
+          </a:p>
+          <a:p>
+            <a:pPr lvl="1">
+              <a:spcAft>
+                <a:spcPts val="600"/>
+              </a:spcAft>
+            </a:pPr>
+            <a:r>
+              <a:rPr sz="1500" b="0" i="0">
+                <a:solidFill>
+                  <a:srgbClr val="2B2B2B"/>
+                </a:solidFill>
+                <a:latin typeface="Calibri"/>
+              </a:rPr>
+              <a:t>●   </a:t>
+            </a:r>
+            <a:r>
+              <a:rPr sz="1500" b="1" i="0">
+                <a:solidFill>
+                  <a:srgbClr val="2B2B2B"/>
+                </a:solidFill>
+                <a:latin typeface="Calibri"/>
+              </a:rPr>
+              <a:t>Verificación de la integración final</a:t>
+            </a:r>
+            <a:r>
+              <a:rPr sz="1500" b="0" i="0">
+                <a:solidFill>
+                  <a:srgbClr val="2B2B2B"/>
+                </a:solidFill>
+                <a:latin typeface="Calibri"/>
+              </a:rPr>
+              <a:t> con checklist en mano.</a:t>
+            </a:r>
+          </a:p>
+          <a:p>
+            <a:pPr lvl="1">
+              <a:spcAft>
+                <a:spcPts val="600"/>
+              </a:spcAft>
+            </a:pPr>
+            <a:r>
+              <a:rPr sz="1500" b="0" i="0">
+                <a:solidFill>
+                  <a:srgbClr val="2B2B2B"/>
+                </a:solidFill>
+                <a:latin typeface="Calibri"/>
+              </a:rPr>
+              <a:t>●   </a:t>
+            </a:r>
+            <a:r>
+              <a:rPr sz="1500" b="1" i="0">
+                <a:solidFill>
+                  <a:srgbClr val="2B2B2B"/>
+                </a:solidFill>
+                <a:latin typeface="Calibri"/>
+              </a:rPr>
+              <a:t>Coevaluación y autoevaluación</a:t>
+            </a:r>
+            <a:r>
+              <a:rPr sz="1500" b="0" i="0">
+                <a:solidFill>
+                  <a:srgbClr val="2B2B2B"/>
+                </a:solidFill>
+                <a:latin typeface="Calibri"/>
+              </a:rPr>
+              <a:t>: cómo dar y recibir retroalimentación con criterios, y qué se diligencia en CDigital.</a:t>
+            </a:r>
+          </a:p>
+          <a:p>
+            <a:pPr lvl="1">
+              <a:spcAft>
+                <a:spcPts val="600"/>
+              </a:spcAft>
+            </a:pPr>
+            <a:r>
+              <a:rPr sz="1500" b="0" i="0">
+                <a:solidFill>
+                  <a:srgbClr val="2B2B2B"/>
+                </a:solidFill>
+                <a:latin typeface="Calibri"/>
+              </a:rPr>
+              <a:t>●   Traiga el documento </a:t>
+            </a:r>
+            <a:r>
+              <a:rPr sz="1500" b="1" i="0">
+                <a:solidFill>
+                  <a:srgbClr val="2B2B2B"/>
+                </a:solidFill>
+                <a:latin typeface="Calibri"/>
+              </a:rPr>
+              <a:t>integrado</a:t>
+            </a:r>
+            <a:r>
+              <a:rPr sz="1500" b="0" i="0">
+                <a:solidFill>
+                  <a:srgbClr val="2B2B2B"/>
+                </a:solidFill>
+                <a:latin typeface="Calibri"/>
+              </a:rPr>
+              <a:t>: en esa sesión lo van a leer sus compañeros.</a:t>
+            </a:r>
+          </a:p>
+        </p:txBody>
+      </p:sp>
+      <p:sp>
+        <p:nvSpPr>
+          <p:cNvPr id="5" name="TextBox 4"/>
+          <p:cNvSpPr txBox="1"/>
+          <p:nvPr/>
+        </p:nvSpPr>
+        <p:spPr>
+          <a:xfrm>
+            <a:off x="11094415" y="6446520"/>
+            <a:ext cx="548640" cy="274320"/>
+          </a:xfrm>
+          <a:prstGeom prst="rect">
+            <a:avLst/>
+          </a:prstGeom>
+          <a:noFill/>
+        </p:spPr>
+        <p:txBody>
+          <a:bodyPr wrap="square" anchor="t" lIns="0" rIns="0" tIns="0" bIns="0">
+            <a:spAutoFit/>
+          </a:bodyPr>
+          <a:lstStyle/>
+          <a:p>
+            <a:pPr algn="r"/>
+            <a:r>
+              <a:rPr sz="1000" b="1" i="0">
+                <a:solidFill>
+                  <a:srgbClr val="8F989D"/>
+                </a:solidFill>
+                <a:latin typeface="Calibri"/>
+              </a:rPr>
+              <a:t>17</a:t>
+            </a:r>
+          </a:p>
+        </p:txBody>
+      </p:sp>
+    </p:spTree>
+  </p:cSld>
+  <p:clrMapOvr>
+    <a:masterClrMapping/>
+  </p:clrMapOvr>
+</p:sld>
+</file>
+
+<file path=ppt/slides/slide18.xml><?xml version="1.0" encoding="utf-8"?>
+<p:sld xmlns:a="http://schemas.openxmlformats.org/drawingml/2006/main" xmlns:p="http://schemas.openxmlformats.org/presentationml/2006/main" xmlns:r="http://schemas.openxmlformats.org/officeDocument/2006/relationships">
+  <p:cSld>
+    <p:bg>
+      <p:bgPr>
+        <a:solidFill>
+          <a:srgbClr val="FFFFFF"/>
+        </a:solidFill>
+        <a:effectLst/>
+      </p:bgPr>
+    </p:bg>
+    <p:spTree>
+      <p:nvGrpSpPr>
+        <p:cNvPr id="1" name=""/>
+        <p:cNvGrpSpPr/>
+        <p:nvPr/>
+      </p:nvGrpSpPr>
+      <p:grpSpPr/>
+      <p:sp>
+        <p:nvSpPr>
+          <p:cNvPr id="2" name="Rectangle 1"/>
+          <p:cNvSpPr/>
+          <p:nvPr/>
+        </p:nvSpPr>
+        <p:spPr>
+          <a:xfrm>
+            <a:off x="0" y="0"/>
+            <a:ext cx="12191695" cy="1188720"/>
+          </a:xfrm>
+          <a:prstGeom prst="rect">
+            <a:avLst/>
+          </a:prstGeom>
+          <a:solidFill>
+            <a:srgbClr val="0C2340"/>
+          </a:solidFill>
+          <a:ln>
+            <a:noFill/>
+          </a:ln>
+          <a:effectLst/>
+        </p:spPr>
+        <p:style>
+          <a:lnRef idx="1">
+            <a:schemeClr val="accent1"/>
+          </a:lnRef>
+          <a:fillRef idx="3">
+            <a:schemeClr val="accent1"/>
+          </a:fillRef>
+          <a:effectRef idx="2">
+            <a:schemeClr val="accent1"/>
+          </a:effectRef>
+          <a:fontRef idx="minor">
+            <a:schemeClr val="lt1"/>
+          </a:fontRef>
+        </p:style>
+        <p:txBody>
+          <a:bodyPr rtlCol="0" anchor="ctr"/>
+          <a:lstStyle/>
+          <a:p>
+            <a:pPr algn="ctr"/>
+          </a:p>
+        </p:txBody>
+      </p:sp>
+      <p:sp>
+        <p:nvSpPr>
+          <p:cNvPr id="3" name="TextBox 2"/>
+          <p:cNvSpPr txBox="1"/>
+          <p:nvPr/>
+        </p:nvSpPr>
+        <p:spPr>
+          <a:xfrm>
+            <a:off x="640080" y="0"/>
+            <a:ext cx="9082735" cy="1188720"/>
+          </a:xfrm>
+          <a:prstGeom prst="rect">
+            <a:avLst/>
+          </a:prstGeom>
+          <a:noFill/>
+        </p:spPr>
+        <p:txBody>
+          <a:bodyPr wrap="square" anchor="ctr" lIns="0" rIns="0" tIns="0" bIns="0">
+            <a:spAutoFit/>
+          </a:bodyPr>
+          <a:lstStyle/>
+          <a:p>
+            <a:pPr algn="ctr"/>
+            <a:r>
+              <a:rPr sz="2600" b="1" i="0">
+                <a:solidFill>
+                  <a:srgbClr val="FFFFFF"/>
+                </a:solidFill>
+                <a:latin typeface="Calibri"/>
+              </a:rPr>
+              <a:t>RUTA DE ENTREGABLES DEL CURSO</a:t>
+            </a:r>
+          </a:p>
+        </p:txBody>
+      </p:sp>
+      <p:sp>
+        <p:nvSpPr>
+          <p:cNvPr id="4" name="TextBox 3"/>
+          <p:cNvSpPr txBox="1"/>
+          <p:nvPr/>
+        </p:nvSpPr>
+        <p:spPr>
+          <a:xfrm>
+            <a:off x="640080" y="1280160"/>
+            <a:ext cx="10911535" cy="411480"/>
+          </a:xfrm>
+          <a:prstGeom prst="rect">
+            <a:avLst/>
+          </a:prstGeom>
+          <a:noFill/>
+        </p:spPr>
+        <p:txBody>
+          <a:bodyPr wrap="square" anchor="t" lIns="0" rIns="0" tIns="0" bIns="0">
+            <a:spAutoFit/>
+          </a:bodyPr>
+          <a:lstStyle/>
+          <a:p>
+            <a:pPr algn="ctr"/>
+            <a:r>
+              <a:rPr sz="1500" b="0" i="0">
+                <a:solidFill>
+                  <a:srgbClr val="2B2B2B"/>
+                </a:solidFill>
+                <a:latin typeface="Calibri"/>
+              </a:rPr>
+              <a:t>Sin fechas a propósito: aquí va </a:t>
+            </a:r>
+            <a:r>
+              <a:rPr sz="1500" b="1" i="0">
+                <a:solidFill>
+                  <a:srgbClr val="2B2B2B"/>
+                </a:solidFill>
+                <a:latin typeface="Calibri"/>
+              </a:rPr>
+              <a:t>en qué punto del curso</a:t>
+            </a:r>
+            <a:r>
+              <a:rPr sz="1500" b="0" i="0">
+                <a:solidFill>
+                  <a:srgbClr val="2B2B2B"/>
+                </a:solidFill>
+                <a:latin typeface="Calibri"/>
+              </a:rPr>
+              <a:t> cierra cada ítem · la ventana exacta la fija CDigital</a:t>
+            </a:r>
+          </a:p>
+        </p:txBody>
+      </p:sp>
+      <p:graphicFrame>
+        <p:nvGraphicFramePr>
+          <p:cNvPr id="5" name="Table 4"/>
+          <p:cNvGraphicFramePr>
+            <a:graphicFrameLocks noGrp="1"/>
+          </p:cNvGraphicFramePr>
+          <p:nvPr/>
+        </p:nvGraphicFramePr>
+        <p:xfrm>
+          <a:off x="640080" y="2011679"/>
+          <a:ext cx="10911533" cy="3017520"/>
+        </p:xfrm>
+        <a:graphic>
+          <a:graphicData uri="http://schemas.openxmlformats.org/drawingml/2006/table">
+            <a:tbl>
+              <a:tblPr>
+                <a:tableStyleId>{2D5ABB26-0587-4C30-8999-92F81FD0307C}</a:tableStyleId>
+              </a:tblPr>
+              <a:tblGrid>
+                <a:gridCol w="2659113"/>
+                <a:gridCol w="2659113"/>
+                <a:gridCol w="5593307"/>
+              </a:tblGrid>
+              <a:tr h="502920">
+                <a:tc>
+                  <a:txBody>
+                    <a:bodyPr/>
+                    <a:lstStyle/>
+                    <a:p>
+                      <a:pPr algn="l"/>
+                      <a:r>
+                        <a:rPr sz="1300" b="1" i="0">
+                          <a:solidFill>
+                            <a:srgbClr val="FFFFFF"/>
+                          </a:solidFill>
+                          <a:latin typeface="Calibri"/>
+                        </a:rPr>
+                        <a:t>Cierra en la semana de…</a:t>
+                      </a:r>
+                    </a:p>
+                  </a:txBody>
+                  <a:tcPr anchor="ctr" marL="109728" marR="91440" marT="36576" marB="36576">
+                    <a:solidFill>
+                      <a:srgbClr val="0C2340"/>
+                    </a:solidFill>
+                  </a:tcPr>
+                </a:tc>
+                <a:tc>
+                  <a:txBody>
+                    <a:bodyPr/>
+                    <a:lstStyle/>
+                    <a:p>
+                      <a:pPr algn="l"/>
+                      <a:r>
+                        <a:rPr sz="1300" b="1" i="0">
+                          <a:solidFill>
+                            <a:srgbClr val="FFFFFF"/>
+                          </a:solidFill>
+                          <a:latin typeface="Calibri"/>
+                        </a:rPr>
+                        <a:t>Entregable</a:t>
+                      </a:r>
+                    </a:p>
+                  </a:txBody>
+                  <a:tcPr anchor="ctr" marL="109728" marR="91440" marT="36576" marB="36576">
+                    <a:solidFill>
+                      <a:srgbClr val="0C2340"/>
+                    </a:solidFill>
+                  </a:tcPr>
+                </a:tc>
+                <a:tc>
+                  <a:txBody>
+                    <a:bodyPr/>
+                    <a:lstStyle/>
+                    <a:p>
+                      <a:pPr algn="l"/>
+                      <a:r>
+                        <a:rPr sz="1300" b="1" i="0">
+                          <a:solidFill>
+                            <a:srgbClr val="FFFFFF"/>
+                          </a:solidFill>
+                          <a:latin typeface="Calibri"/>
+                        </a:rPr>
+                        <a:t>Qué debes tener listo</a:t>
+                      </a:r>
+                    </a:p>
+                  </a:txBody>
+                  <a:tcPr anchor="ctr" marL="109728" marR="91440" marT="36576" marB="36576">
+                    <a:solidFill>
+                      <a:srgbClr val="0C2340"/>
+                    </a:solidFill>
+                  </a:tcPr>
+                </a:tc>
+              </a:tr>
+              <a:tr h="502920">
+                <a:tc>
+                  <a:txBody>
+                    <a:bodyPr/>
+                    <a:lstStyle/>
+                    <a:p>
+                      <a:pPr algn="l"/>
+                      <a:r>
+                        <a:rPr sz="1100" b="1" i="0">
+                          <a:solidFill>
+                            <a:srgbClr val="2B2B2B"/>
+                          </a:solidFill>
+                          <a:latin typeface="Calibri"/>
+                        </a:rPr>
+                        <a:t>Sesión 02</a:t>
+                      </a:r>
+                      <a:r>
+                        <a:rPr sz="1100" b="0" i="0">
+                          <a:solidFill>
+                            <a:srgbClr val="2B2B2B"/>
+                          </a:solidFill>
+                          <a:latin typeface="Calibri"/>
+                        </a:rPr>
+                        <a:t> · ya cerró</a:t>
+                      </a:r>
+                    </a:p>
+                  </a:txBody>
+                  <a:tcPr anchor="ctr" marL="109728" marR="91440" marT="36576" marB="36576">
+                    <a:solidFill>
+                      <a:srgbClr val="FFFFFF"/>
+                    </a:solidFill>
+                  </a:tcPr>
+                </a:tc>
+                <a:tc>
+                  <a:txBody>
+                    <a:bodyPr/>
+                    <a:lstStyle/>
+                    <a:p>
+                      <a:pPr algn="l"/>
+                      <a:r>
+                        <a:rPr sz="1100" b="1" i="0">
+                          <a:solidFill>
+                            <a:srgbClr val="2B2B2B"/>
+                          </a:solidFill>
+                          <a:latin typeface="Calibri"/>
+                        </a:rPr>
+                        <a:t>Quiz</a:t>
+                      </a:r>
+                      <a:r>
+                        <a:rPr sz="1100" b="0" i="0">
+                          <a:solidFill>
+                            <a:srgbClr val="2B2B2B"/>
+                          </a:solidFill>
+                          <a:latin typeface="Calibri"/>
+                        </a:rPr>
+                        <a:t> · Cuestionario · 25%</a:t>
+                      </a:r>
+                    </a:p>
+                  </a:txBody>
+                  <a:tcPr anchor="ctr" marL="109728" marR="91440" marT="36576" marB="36576">
+                    <a:solidFill>
+                      <a:srgbClr val="FFFFFF"/>
+                    </a:solidFill>
+                  </a:tcPr>
+                </a:tc>
+                <a:tc>
+                  <a:txBody>
+                    <a:bodyPr/>
+                    <a:lstStyle/>
+                    <a:p>
+                      <a:pPr algn="l"/>
+                      <a:r>
+                        <a:rPr sz="1100" b="0" i="0">
+                          <a:solidFill>
+                            <a:srgbClr val="2B2B2B"/>
+                          </a:solidFill>
+                          <a:latin typeface="Calibri"/>
+                        </a:rPr>
+                        <a:t>Estudia </a:t>
+                      </a:r>
+                      <a:r>
+                        <a:rPr sz="1100" b="1" i="0">
+                          <a:solidFill>
+                            <a:srgbClr val="2B2B2B"/>
+                          </a:solidFill>
+                          <a:latin typeface="Calibri"/>
+                        </a:rPr>
+                        <a:t>problema y pregunta</a:t>
+                      </a:r>
+                      <a:r>
+                        <a:rPr sz="1100" b="0" i="0">
+                          <a:solidFill>
+                            <a:srgbClr val="2B2B2B"/>
+                          </a:solidFill>
+                          <a:latin typeface="Calibri"/>
+                        </a:rPr>
+                        <a:t> de investigación; resuélvelo dentro de su ventana.</a:t>
+                      </a:r>
+                    </a:p>
+                  </a:txBody>
+                  <a:tcPr anchor="ctr" marL="109728" marR="91440" marT="36576" marB="36576">
+                    <a:solidFill>
+                      <a:srgbClr val="FFFFFF"/>
+                    </a:solidFill>
+                  </a:tcPr>
+                </a:tc>
+              </a:tr>
+              <a:tr h="502920">
+                <a:tc>
+                  <a:txBody>
+                    <a:bodyPr/>
+                    <a:lstStyle/>
+                    <a:p>
+                      <a:pPr algn="l"/>
+                      <a:r>
+                        <a:rPr sz="1100" b="1" i="0">
+                          <a:solidFill>
+                            <a:srgbClr val="2B2B2B"/>
+                          </a:solidFill>
+                          <a:latin typeface="Calibri"/>
+                        </a:rPr>
+                        <a:t>Sesión 07</a:t>
+                      </a:r>
+                      <a:r>
+                        <a:rPr sz="1100" b="0" i="0">
+                          <a:solidFill>
+                            <a:srgbClr val="2B2B2B"/>
+                          </a:solidFill>
+                          <a:latin typeface="Calibri"/>
+                        </a:rPr>
+                        <a:t> · ya cerró</a:t>
+                      </a:r>
+                    </a:p>
+                  </a:txBody>
+                  <a:tcPr anchor="ctr" marL="109728" marR="91440" marT="36576" marB="36576">
+                    <a:solidFill>
+                      <a:srgbClr val="F2F2F2"/>
+                    </a:solidFill>
+                  </a:tcPr>
+                </a:tc>
+                <a:tc>
+                  <a:txBody>
+                    <a:bodyPr/>
+                    <a:lstStyle/>
+                    <a:p>
+                      <a:pPr algn="l"/>
+                      <a:r>
+                        <a:rPr sz="1100" b="1" i="0">
+                          <a:solidFill>
+                            <a:srgbClr val="2B2B2B"/>
+                          </a:solidFill>
+                          <a:latin typeface="Calibri"/>
+                        </a:rPr>
+                        <a:t>ACA 1</a:t>
+                      </a:r>
+                      <a:r>
+                        <a:rPr sz="1100" b="0" i="0">
+                          <a:solidFill>
+                            <a:srgbClr val="2B2B2B"/>
+                          </a:solidFill>
+                          <a:latin typeface="Calibri"/>
+                        </a:rPr>
+                        <a:t> · Tarea · 25%</a:t>
+                      </a:r>
+                    </a:p>
+                  </a:txBody>
+                  <a:tcPr anchor="ctr" marL="109728" marR="91440" marT="36576" marB="36576">
+                    <a:solidFill>
+                      <a:srgbClr val="F2F2F2"/>
+                    </a:solidFill>
+                  </a:tcPr>
+                </a:tc>
+                <a:tc>
+                  <a:txBody>
+                    <a:bodyPr/>
+                    <a:lstStyle/>
+                    <a:p>
+                      <a:pPr algn="l"/>
+                      <a:r>
+                        <a:rPr sz="1100" b="0" i="0">
+                          <a:solidFill>
+                            <a:srgbClr val="2B2B2B"/>
+                          </a:solidFill>
+                          <a:latin typeface="Calibri"/>
+                        </a:rPr>
+                        <a:t>Sube en </a:t>
+                      </a:r>
+                      <a:r>
+                        <a:rPr sz="1100" b="1" i="0">
+                          <a:solidFill>
+                            <a:srgbClr val="2B2B2B"/>
+                          </a:solidFill>
+                          <a:latin typeface="Calibri"/>
+                        </a:rPr>
+                        <a:t>plantilla APA</a:t>
+                      </a:r>
+                      <a:r>
+                        <a:rPr sz="1100" b="0" i="0">
+                          <a:solidFill>
+                            <a:srgbClr val="2B2B2B"/>
+                          </a:solidFill>
+                          <a:latin typeface="Calibri"/>
+                        </a:rPr>
+                        <a:t> problema, pregunta, objetivos, mínimo 6 antecedentes y los marcos.</a:t>
+                      </a:r>
+                    </a:p>
+                  </a:txBody>
+                  <a:tcPr anchor="ctr" marL="109728" marR="91440" marT="36576" marB="36576">
+                    <a:solidFill>
+                      <a:srgbClr val="F2F2F2"/>
+                    </a:solidFill>
+                  </a:tcPr>
+                </a:tc>
+              </a:tr>
+              <a:tr h="502920">
+                <a:tc>
+                  <a:txBody>
+                    <a:bodyPr/>
+                    <a:lstStyle/>
+                    <a:p>
+                      <a:pPr algn="l"/>
+                      <a:r>
+                        <a:rPr sz="1100" b="1" i="0">
+                          <a:solidFill>
+                            <a:srgbClr val="2B2B2B"/>
+                          </a:solidFill>
+                          <a:latin typeface="Calibri"/>
+                        </a:rPr>
+                        <a:t>Sesión 10</a:t>
+                      </a:r>
+                      <a:r>
+                        <a:rPr sz="1100" b="0" i="0">
+                          <a:solidFill>
+                            <a:srgbClr val="2B2B2B"/>
+                          </a:solidFill>
+                          <a:latin typeface="Calibri"/>
+                        </a:rPr>
+                        <a:t> · cierra esta semana</a:t>
+                      </a:r>
+                    </a:p>
+                  </a:txBody>
+                  <a:tcPr anchor="ctr" marL="109728" marR="91440" marT="36576" marB="36576">
+                    <a:solidFill>
+                      <a:srgbClr val="FFFFFF"/>
+                    </a:solidFill>
+                  </a:tcPr>
+                </a:tc>
+                <a:tc>
+                  <a:txBody>
+                    <a:bodyPr/>
+                    <a:lstStyle/>
+                    <a:p>
+                      <a:pPr algn="l"/>
+                      <a:r>
+                        <a:rPr sz="1100" b="1" i="0">
+                          <a:solidFill>
+                            <a:srgbClr val="2B2B2B"/>
+                          </a:solidFill>
+                          <a:latin typeface="Calibri"/>
+                        </a:rPr>
+                        <a:t>ACA FINAL</a:t>
+                      </a:r>
+                      <a:r>
+                        <a:rPr sz="1100" b="0" i="0">
+                          <a:solidFill>
+                            <a:srgbClr val="2B2B2B"/>
+                          </a:solidFill>
+                          <a:latin typeface="Calibri"/>
+                        </a:rPr>
+                        <a:t> · Tarea · 42%</a:t>
+                      </a:r>
+                    </a:p>
+                  </a:txBody>
+                  <a:tcPr anchor="ctr" marL="109728" marR="91440" marT="36576" marB="36576">
+                    <a:solidFill>
+                      <a:srgbClr val="FFFFFF"/>
+                    </a:solidFill>
+                  </a:tcPr>
+                </a:tc>
+                <a:tc>
+                  <a:txBody>
+                    <a:bodyPr/>
+                    <a:lstStyle/>
+                    <a:p>
+                      <a:pPr algn="l"/>
+                      <a:r>
+                        <a:rPr sz="1100" b="0" i="0">
+                          <a:solidFill>
+                            <a:srgbClr val="2B2B2B"/>
+                          </a:solidFill>
+                          <a:latin typeface="Calibri"/>
+                        </a:rPr>
+                        <a:t>Sube el anteproyecto integrado con las </a:t>
+                      </a:r>
+                      <a:r>
+                        <a:rPr sz="1100" b="1" i="0">
+                          <a:solidFill>
+                            <a:srgbClr val="2B2B2B"/>
+                          </a:solidFill>
+                          <a:latin typeface="Calibri"/>
+                        </a:rPr>
+                        <a:t>correcciones</a:t>
+                      </a:r>
+                      <a:r>
+                        <a:rPr sz="1100" b="0" i="0">
+                          <a:solidFill>
+                            <a:srgbClr val="2B2B2B"/>
+                          </a:solidFill>
+                          <a:latin typeface="Calibri"/>
+                        </a:rPr>
+                        <a:t> de la ACA 1, metodología y viabilidad.</a:t>
+                      </a:r>
+                    </a:p>
+                  </a:txBody>
+                  <a:tcPr anchor="ctr" marL="109728" marR="91440" marT="36576" marB="36576">
+                    <a:solidFill>
+                      <a:srgbClr val="FFFFFF"/>
+                    </a:solidFill>
+                  </a:tcPr>
+                </a:tc>
+              </a:tr>
+              <a:tr h="502920">
+                <a:tc>
+                  <a:txBody>
+                    <a:bodyPr/>
+                    <a:lstStyle/>
+                    <a:p>
+                      <a:pPr algn="l"/>
+                      <a:r>
+                        <a:rPr sz="1100" b="1" i="0">
+                          <a:solidFill>
+                            <a:srgbClr val="2B2B2B"/>
+                          </a:solidFill>
+                          <a:latin typeface="Calibri"/>
+                        </a:rPr>
+                        <a:t>Sesión 11</a:t>
+                      </a:r>
+                      <a:r>
+                        <a:rPr sz="1100" b="0" i="0">
+                          <a:solidFill>
+                            <a:srgbClr val="2B2B2B"/>
+                          </a:solidFill>
+                          <a:latin typeface="Calibri"/>
+                        </a:rPr>
+                        <a:t> · pendiente</a:t>
+                      </a:r>
+                    </a:p>
+                  </a:txBody>
+                  <a:tcPr anchor="ctr" marL="109728" marR="91440" marT="36576" marB="36576">
+                    <a:solidFill>
+                      <a:srgbClr val="F2F2F2"/>
+                    </a:solidFill>
+                  </a:tcPr>
+                </a:tc>
+                <a:tc>
+                  <a:txBody>
+                    <a:bodyPr/>
+                    <a:lstStyle/>
+                    <a:p>
+                      <a:pPr algn="l"/>
+                      <a:r>
+                        <a:rPr sz="1100" b="1" i="0">
+                          <a:solidFill>
+                            <a:srgbClr val="2B2B2B"/>
+                          </a:solidFill>
+                          <a:latin typeface="Calibri"/>
+                        </a:rPr>
+                        <a:t>Autoevaluación</a:t>
+                      </a:r>
+                      <a:r>
+                        <a:rPr sz="1100" b="0" i="0">
+                          <a:solidFill>
+                            <a:srgbClr val="2B2B2B"/>
+                          </a:solidFill>
+                          <a:latin typeface="Calibri"/>
+                        </a:rPr>
+                        <a:t> · Cuestionario · 4%</a:t>
+                      </a:r>
+                    </a:p>
+                  </a:txBody>
+                  <a:tcPr anchor="ctr" marL="109728" marR="91440" marT="36576" marB="36576">
+                    <a:solidFill>
+                      <a:srgbClr val="F2F2F2"/>
+                    </a:solidFill>
+                  </a:tcPr>
+                </a:tc>
+                <a:tc>
+                  <a:txBody>
+                    <a:bodyPr/>
+                    <a:lstStyle/>
+                    <a:p>
+                      <a:pPr algn="l"/>
+                      <a:r>
+                        <a:rPr sz="1100" b="0" i="0">
+                          <a:solidFill>
+                            <a:srgbClr val="2B2B2B"/>
+                          </a:solidFill>
+                          <a:latin typeface="Calibri"/>
+                        </a:rPr>
+                        <a:t>Diligénciala tú, dentro de su ventana, según tu </a:t>
+                      </a:r>
+                      <a:r>
+                        <a:rPr sz="1100" b="1" i="0">
+                          <a:solidFill>
+                            <a:srgbClr val="2B2B2B"/>
+                          </a:solidFill>
+                          <a:latin typeface="Calibri"/>
+                        </a:rPr>
+                        <a:t>participación real</a:t>
+                      </a:r>
+                      <a:r>
+                        <a:rPr sz="1100" b="0" i="0">
+                          <a:solidFill>
+                            <a:srgbClr val="2B2B2B"/>
+                          </a:solidFill>
+                          <a:latin typeface="Calibri"/>
+                        </a:rPr>
+                        <a:t>.</a:t>
+                      </a:r>
+                    </a:p>
+                  </a:txBody>
+                  <a:tcPr anchor="ctr" marL="109728" marR="91440" marT="36576" marB="36576">
+                    <a:solidFill>
+                      <a:srgbClr val="F2F2F2"/>
+                    </a:solidFill>
+                  </a:tcPr>
+                </a:tc>
+              </a:tr>
+              <a:tr h="502920">
+                <a:tc>
+                  <a:txBody>
+                    <a:bodyPr/>
+                    <a:lstStyle/>
+                    <a:p>
+                      <a:pPr algn="l"/>
+                      <a:r>
+                        <a:rPr sz="1100" b="1" i="0">
+                          <a:solidFill>
+                            <a:srgbClr val="2B2B2B"/>
+                          </a:solidFill>
+                          <a:latin typeface="Calibri"/>
+                        </a:rPr>
+                        <a:t>Sesión 11</a:t>
+                      </a:r>
+                      <a:r>
+                        <a:rPr sz="1100" b="0" i="0">
+                          <a:solidFill>
+                            <a:srgbClr val="2B2B2B"/>
+                          </a:solidFill>
+                          <a:latin typeface="Calibri"/>
+                        </a:rPr>
+                        <a:t> · pendiente</a:t>
+                      </a:r>
+                    </a:p>
+                  </a:txBody>
+                  <a:tcPr anchor="ctr" marL="109728" marR="91440" marT="36576" marB="36576">
+                    <a:solidFill>
+                      <a:srgbClr val="FFFFFF"/>
+                    </a:solidFill>
+                  </a:tcPr>
+                </a:tc>
+                <a:tc>
+                  <a:txBody>
+                    <a:bodyPr/>
+                    <a:lstStyle/>
+                    <a:p>
+                      <a:pPr algn="l"/>
+                      <a:r>
+                        <a:rPr sz="1100" b="1" i="0">
+                          <a:solidFill>
+                            <a:srgbClr val="2B2B2B"/>
+                          </a:solidFill>
+                          <a:latin typeface="Calibri"/>
+                        </a:rPr>
+                        <a:t>Coevaluación</a:t>
+                      </a:r>
+                      <a:r>
+                        <a:rPr sz="1100" b="0" i="0">
+                          <a:solidFill>
+                            <a:srgbClr val="2B2B2B"/>
+                          </a:solidFill>
+                          <a:latin typeface="Calibri"/>
+                        </a:rPr>
+                        <a:t> · Foro · 4%</a:t>
+                      </a:r>
+                    </a:p>
+                  </a:txBody>
+                  <a:tcPr anchor="ctr" marL="109728" marR="91440" marT="36576" marB="36576">
+                    <a:solidFill>
+                      <a:srgbClr val="FFFFFF"/>
+                    </a:solidFill>
+                  </a:tcPr>
+                </a:tc>
+                <a:tc>
+                  <a:txBody>
+                    <a:bodyPr/>
+                    <a:lstStyle/>
+                    <a:p>
+                      <a:pPr algn="l"/>
+                      <a:r>
+                        <a:rPr sz="1100" b="1" i="0">
+                          <a:solidFill>
+                            <a:srgbClr val="2B2B2B"/>
+                          </a:solidFill>
+                          <a:latin typeface="Calibri"/>
+                        </a:rPr>
+                        <a:t>Publica</a:t>
+                      </a:r>
+                      <a:r>
+                        <a:rPr sz="1100" b="0" i="0">
+                          <a:solidFill>
+                            <a:srgbClr val="2B2B2B"/>
+                          </a:solidFill>
+                          <a:latin typeface="Calibri"/>
+                        </a:rPr>
+                        <a:t> tu propio aporte y valora hechos del trabajo del equipo, con respeto.</a:t>
+                      </a:r>
+                    </a:p>
+                  </a:txBody>
+                  <a:tcPr anchor="ctr" marL="109728" marR="91440" marT="36576" marB="36576">
+                    <a:solidFill>
+                      <a:srgbClr val="FFFFFF"/>
+                    </a:solidFill>
+                  </a:tcPr>
+                </a:tc>
+              </a:tr>
+            </a:tbl>
+          </a:graphicData>
+        </a:graphic>
+      </p:graphicFrame>
+      <p:sp>
+        <p:nvSpPr>
+          <p:cNvPr id="6" name="TextBox 5"/>
+          <p:cNvSpPr txBox="1"/>
+          <p:nvPr/>
+        </p:nvSpPr>
+        <p:spPr>
+          <a:xfrm>
+            <a:off x="640080" y="5166360"/>
+            <a:ext cx="10911535" cy="548640"/>
+          </a:xfrm>
+          <a:prstGeom prst="rect">
+            <a:avLst/>
+          </a:prstGeom>
+          <a:noFill/>
+        </p:spPr>
+        <p:txBody>
+          <a:bodyPr wrap="square" anchor="t" lIns="0" rIns="0" tIns="0" bIns="0">
+            <a:spAutoFit/>
+          </a:bodyPr>
+          <a:lstStyle/>
+          <a:p>
+            <a:r>
+              <a:rPr sz="1200" b="0" i="1">
+                <a:solidFill>
+                  <a:srgbClr val="2B2B2B"/>
+                </a:solidFill>
+                <a:latin typeface="Calibri"/>
+              </a:rPr>
+              <a:t>Esta misma tabla va al final de todas las sesiones. La </a:t>
+            </a:r>
+            <a:r>
+              <a:rPr sz="1200" b="1" i="1">
+                <a:solidFill>
+                  <a:srgbClr val="2B2B2B"/>
+                </a:solidFill>
+                <a:latin typeface="Calibri"/>
+              </a:rPr>
+              <a:t>fecha</a:t>
+            </a:r>
+            <a:r>
+              <a:rPr sz="1200" b="0" i="1">
+                <a:solidFill>
+                  <a:srgbClr val="2B2B2B"/>
+                </a:solidFill>
+                <a:latin typeface="Calibri"/>
+              </a:rPr>
+              <a:t> de cada ventana está en el enunciado del ítem (`Clases/Recursos/ACAs/`) y en el aula: si el aula y cualquier otro material se contradicen, </a:t>
+            </a:r>
+            <a:r>
+              <a:rPr sz="1200" b="1" i="1">
+                <a:solidFill>
+                  <a:srgbClr val="2B2B2B"/>
+                </a:solidFill>
+                <a:latin typeface="Calibri"/>
+              </a:rPr>
+              <a:t>manda el aula</a:t>
+            </a:r>
+            <a:r>
+              <a:rPr sz="1200" b="0" i="1">
+                <a:solidFill>
+                  <a:srgbClr val="2B2B2B"/>
+                </a:solidFill>
+                <a:latin typeface="Calibri"/>
+              </a:rPr>
+              <a:t>.</a:t>
+            </a:r>
+          </a:p>
+        </p:txBody>
+      </p:sp>
+      <p:sp>
+        <p:nvSpPr>
+          <p:cNvPr id="7" name="TextBox 6"/>
+          <p:cNvSpPr txBox="1"/>
+          <p:nvPr/>
+        </p:nvSpPr>
+        <p:spPr>
+          <a:xfrm>
+            <a:off x="11094415" y="6446520"/>
+            <a:ext cx="548640" cy="274320"/>
+          </a:xfrm>
+          <a:prstGeom prst="rect">
+            <a:avLst/>
+          </a:prstGeom>
+          <a:noFill/>
+        </p:spPr>
+        <p:txBody>
+          <a:bodyPr wrap="square" anchor="t" lIns="0" rIns="0" tIns="0" bIns="0">
+            <a:spAutoFit/>
+          </a:bodyPr>
+          <a:lstStyle/>
+          <a:p>
+            <a:pPr algn="r"/>
+            <a:r>
+              <a:rPr sz="1000" b="1" i="0">
+                <a:solidFill>
+                  <a:srgbClr val="8F989D"/>
+                </a:solidFill>
+                <a:latin typeface="Calibri"/>
+              </a:rPr>
+              <a:t>18</a:t>
+            </a:r>
+          </a:p>
+        </p:txBody>
+      </p:sp>
+    </p:spTree>
+  </p:cSld>
+  <p:clrMapOvr>
+    <a:masterClrMapping/>
+  </p:clrMapOvr>
+</p:sld>
+</file>
+
+<file path=ppt/slides/slide19.xml><?xml version="1.0" encoding="utf-8"?>
 <p:sld xmlns:a="http://schemas.openxmlformats.org/drawingml/2006/main" xmlns:p="http://schemas.openxmlformats.org/presentationml/2006/main" xmlns:r="http://schemas.openxmlformats.org/officeDocument/2006/relationships">
   <p:cSld>
     <p:bg>
